--- a/DocumentazioneDiProgetto_ElHanafi.pptx
+++ b/DocumentazioneDiProgetto_ElHanafi.pptx
@@ -5593,7 +5593,7 @@
             <a:avLst/>
           </a:prstGeom>
           <a:solidFill>
-            <a:srgbClr val="EBF4FB"/>
+            <a:srgbClr val="F0F8FF"/>
           </a:solidFill>
           <a:ln w="8890">
             <a:solidFill>
@@ -6572,7 +6572,7 @@
           <p:nvPr>
             <p:extLst>
               <p:ext uri="{D42A27DB-BD31-4B8C-83A1-F6EECF244321}">
-                <p14:modId xmlns:p14="http://schemas.microsoft.com/office/powerpoint/2010/main" val="3733899021"/>
+                <p14:modId xmlns:p14="http://schemas.microsoft.com/office/powerpoint/2010/main" val="2225525107"/>
               </p:ext>
             </p:extLst>
           </p:nvPr>
@@ -6759,7 +6759,7 @@
                   </a:txBody>
                   <a:tcPr>
                     <a:solidFill>
-                      <a:srgbClr val="F5F7FA"/>
+                      <a:srgbClr val="F0F8FF"/>
                     </a:solidFill>
                   </a:tcPr>
                 </a:tc>
@@ -6778,7 +6778,7 @@
                   </a:txBody>
                   <a:tcPr>
                     <a:solidFill>
-                      <a:srgbClr val="F5F7FA"/>
+                      <a:srgbClr val="F0F8FF"/>
                     </a:solidFill>
                   </a:tcPr>
                 </a:tc>
@@ -6797,7 +6797,7 @@
                   </a:txBody>
                   <a:tcPr>
                     <a:solidFill>
-                      <a:srgbClr val="F5F7FA"/>
+                      <a:srgbClr val="F0F8FF"/>
                     </a:solidFill>
                   </a:tcPr>
                 </a:tc>
@@ -6816,7 +6816,7 @@
                   </a:txBody>
                   <a:tcPr>
                     <a:solidFill>
-                      <a:srgbClr val="F5F7FA"/>
+                      <a:srgbClr val="F0F8FF"/>
                     </a:solidFill>
                   </a:tcPr>
                 </a:tc>
@@ -6835,7 +6835,7 @@
                   </a:txBody>
                   <a:tcPr>
                     <a:solidFill>
-                      <a:srgbClr val="F5F7FA"/>
+                      <a:srgbClr val="F0F8FF"/>
                     </a:solidFill>
                   </a:tcPr>
                 </a:tc>
@@ -6861,7 +6861,7 @@
                   </a:txBody>
                   <a:tcPr>
                     <a:solidFill>
-                      <a:srgbClr val="FFFFFF"/>
+                      <a:srgbClr val="F0F8FF"/>
                     </a:solidFill>
                   </a:tcPr>
                 </a:tc>
@@ -6880,7 +6880,7 @@
                   </a:txBody>
                   <a:tcPr>
                     <a:solidFill>
-                      <a:srgbClr val="FFFFFF"/>
+                      <a:srgbClr val="F0F8FF"/>
                     </a:solidFill>
                   </a:tcPr>
                 </a:tc>
@@ -6899,7 +6899,7 @@
                   </a:txBody>
                   <a:tcPr>
                     <a:solidFill>
-                      <a:srgbClr val="FFFFFF"/>
+                      <a:srgbClr val="F0F8FF"/>
                     </a:solidFill>
                   </a:tcPr>
                 </a:tc>
@@ -6918,7 +6918,7 @@
                   </a:txBody>
                   <a:tcPr>
                     <a:solidFill>
-                      <a:srgbClr val="FFFFFF"/>
+                      <a:srgbClr val="F0F8FF"/>
                     </a:solidFill>
                   </a:tcPr>
                 </a:tc>
@@ -6937,7 +6937,7 @@
                   </a:txBody>
                   <a:tcPr>
                     <a:solidFill>
-                      <a:srgbClr val="FFFFFF"/>
+                      <a:srgbClr val="F0F8FF"/>
                     </a:solidFill>
                   </a:tcPr>
                 </a:tc>
@@ -6966,7 +6966,7 @@
                   </a:txBody>
                   <a:tcPr>
                     <a:solidFill>
-                      <a:srgbClr val="F5F7FA"/>
+                      <a:srgbClr val="F0F8FF"/>
                     </a:solidFill>
                   </a:tcPr>
                 </a:tc>
@@ -6988,7 +6988,7 @@
                   </a:txBody>
                   <a:tcPr>
                     <a:solidFill>
-                      <a:srgbClr val="F5F7FA"/>
+                      <a:srgbClr val="F0F8FF"/>
                     </a:solidFill>
                   </a:tcPr>
                 </a:tc>
@@ -7010,7 +7010,7 @@
                   </a:txBody>
                   <a:tcPr>
                     <a:solidFill>
-                      <a:srgbClr val="F5F7FA"/>
+                      <a:srgbClr val="F0F8FF"/>
                     </a:solidFill>
                   </a:tcPr>
                 </a:tc>
@@ -7032,7 +7032,7 @@
                   </a:txBody>
                   <a:tcPr>
                     <a:solidFill>
-                      <a:srgbClr val="F5F7FA"/>
+                      <a:srgbClr val="F0F8FF"/>
                     </a:solidFill>
                   </a:tcPr>
                 </a:tc>
@@ -7054,7 +7054,7 @@
                   </a:txBody>
                   <a:tcPr>
                     <a:solidFill>
-                      <a:srgbClr val="F5F7FA"/>
+                      <a:srgbClr val="F0F8FF"/>
                     </a:solidFill>
                   </a:tcPr>
                 </a:tc>
@@ -7083,7 +7083,7 @@
                   </a:txBody>
                   <a:tcPr>
                     <a:solidFill>
-                      <a:srgbClr val="FFFFFF"/>
+                      <a:srgbClr val="F0F8FF"/>
                     </a:solidFill>
                   </a:tcPr>
                 </a:tc>
@@ -7105,7 +7105,7 @@
                   </a:txBody>
                   <a:tcPr>
                     <a:solidFill>
-                      <a:srgbClr val="FFFFFF"/>
+                      <a:srgbClr val="F0F8FF"/>
                     </a:solidFill>
                   </a:tcPr>
                 </a:tc>
@@ -7127,7 +7127,7 @@
                   </a:txBody>
                   <a:tcPr>
                     <a:solidFill>
-                      <a:srgbClr val="FFFFFF"/>
+                      <a:srgbClr val="F0F8FF"/>
                     </a:solidFill>
                   </a:tcPr>
                 </a:tc>
@@ -7149,7 +7149,7 @@
                   </a:txBody>
                   <a:tcPr>
                     <a:solidFill>
-                      <a:srgbClr val="FFFFFF"/>
+                      <a:srgbClr val="F0F8FF"/>
                     </a:solidFill>
                   </a:tcPr>
                 </a:tc>
@@ -7171,7 +7171,7 @@
                   </a:txBody>
                   <a:tcPr>
                     <a:solidFill>
-                      <a:srgbClr val="FFFFFF"/>
+                      <a:srgbClr val="F0F8FF"/>
                     </a:solidFill>
                   </a:tcPr>
                 </a:tc>
@@ -7509,7 +7509,7 @@
           <p:nvPr>
             <p:extLst>
               <p:ext uri="{D42A27DB-BD31-4B8C-83A1-F6EECF244321}">
-                <p14:modId xmlns:p14="http://schemas.microsoft.com/office/powerpoint/2010/main" val="743056449"/>
+                <p14:modId xmlns:p14="http://schemas.microsoft.com/office/powerpoint/2010/main" val="3070968033"/>
               </p:ext>
             </p:extLst>
           </p:nvPr>
@@ -7685,16 +7685,19 @@
                     <a:lstStyle/>
                     <a:p>
                       <a:r>
-                        <a:rPr sz="1000">
+                        <a:rPr sz="1000" dirty="0" err="1">
                           <a:latin typeface="Calibri"/>
                         </a:rPr>
                         <a:t>log₂NFIFO</a:t>
                       </a:r>
+                      <a:endParaRPr sz="1000" dirty="0">
+                        <a:latin typeface="Calibri"/>
+                      </a:endParaRPr>
                     </a:p>
                   </a:txBody>
                   <a:tcPr>
                     <a:solidFill>
-                      <a:srgbClr val="F5F7FA"/>
+                      <a:srgbClr val="F0F8FF"/>
                     </a:solidFill>
                   </a:tcPr>
                 </a:tc>
@@ -7713,7 +7716,7 @@
                   </a:txBody>
                   <a:tcPr>
                     <a:solidFill>
-                      <a:srgbClr val="F5F7FA"/>
+                      <a:srgbClr val="F0F8FF"/>
                     </a:solidFill>
                   </a:tcPr>
                 </a:tc>
@@ -7732,7 +7735,7 @@
                   </a:txBody>
                   <a:tcPr>
                     <a:solidFill>
-                      <a:srgbClr val="F5F7FA"/>
+                      <a:srgbClr val="F0F8FF"/>
                     </a:solidFill>
                   </a:tcPr>
                 </a:tc>
@@ -7751,7 +7754,7 @@
                   </a:txBody>
                   <a:tcPr>
                     <a:solidFill>
-                      <a:srgbClr val="F5F7FA"/>
+                      <a:srgbClr val="F0F8FF"/>
                     </a:solidFill>
                   </a:tcPr>
                 </a:tc>
@@ -7770,7 +7773,7 @@
                   </a:txBody>
                   <a:tcPr>
                     <a:solidFill>
-                      <a:srgbClr val="F5F7FA"/>
+                      <a:srgbClr val="F0F8FF"/>
                     </a:solidFill>
                   </a:tcPr>
                 </a:tc>
@@ -7796,7 +7799,7 @@
                   </a:txBody>
                   <a:tcPr>
                     <a:solidFill>
-                      <a:srgbClr val="FFFFFF"/>
+                      <a:srgbClr val="F0F8FF"/>
                     </a:solidFill>
                   </a:tcPr>
                 </a:tc>
@@ -7806,7 +7809,7 @@
                     <a:lstStyle/>
                     <a:p>
                       <a:r>
-                        <a:rPr sz="1000">
+                        <a:rPr sz="1000" dirty="0">
                           <a:latin typeface="Calibri"/>
                         </a:rPr>
                         <a:t>781.25</a:t>
@@ -7815,7 +7818,7 @@
                   </a:txBody>
                   <a:tcPr>
                     <a:solidFill>
-                      <a:srgbClr val="FFFFFF"/>
+                      <a:srgbClr val="F0F8FF"/>
                     </a:solidFill>
                   </a:tcPr>
                 </a:tc>
@@ -7834,7 +7837,7 @@
                   </a:txBody>
                   <a:tcPr>
                     <a:solidFill>
-                      <a:srgbClr val="FFFFFF"/>
+                      <a:srgbClr val="F0F8FF"/>
                     </a:solidFill>
                   </a:tcPr>
                 </a:tc>
@@ -7853,7 +7856,7 @@
                   </a:txBody>
                   <a:tcPr>
                     <a:solidFill>
-                      <a:srgbClr val="FFFFFF"/>
+                      <a:srgbClr val="F0F8FF"/>
                     </a:solidFill>
                   </a:tcPr>
                 </a:tc>
@@ -7872,7 +7875,7 @@
                   </a:txBody>
                   <a:tcPr>
                     <a:solidFill>
-                      <a:srgbClr val="FFFFFF"/>
+                      <a:srgbClr val="F0F8FF"/>
                     </a:solidFill>
                   </a:tcPr>
                 </a:tc>
@@ -7898,7 +7901,7 @@
                   </a:txBody>
                   <a:tcPr>
                     <a:solidFill>
-                      <a:srgbClr val="F5F7FA"/>
+                      <a:srgbClr val="F0F8FF"/>
                     </a:solidFill>
                   </a:tcPr>
                 </a:tc>
@@ -7908,7 +7911,7 @@
                     <a:lstStyle/>
                     <a:p>
                       <a:r>
-                        <a:rPr sz="1000">
+                        <a:rPr sz="1000" dirty="0">
                           <a:latin typeface="Calibri"/>
                         </a:rPr>
                         <a:t>Wide</a:t>
@@ -7917,7 +7920,7 @@
                   </a:txBody>
                   <a:tcPr>
                     <a:solidFill>
-                      <a:srgbClr val="F5F7FA"/>
+                      <a:srgbClr val="F0F8FF"/>
                     </a:solidFill>
                   </a:tcPr>
                 </a:tc>
@@ -7936,7 +7939,7 @@
                   </a:txBody>
                   <a:tcPr>
                     <a:solidFill>
-                      <a:srgbClr val="F5F7FA"/>
+                      <a:srgbClr val="F0F8FF"/>
                     </a:solidFill>
                   </a:tcPr>
                 </a:tc>
@@ -7955,7 +7958,7 @@
                   </a:txBody>
                   <a:tcPr>
                     <a:solidFill>
-                      <a:srgbClr val="F5F7FA"/>
+                      <a:srgbClr val="F0F8FF"/>
                     </a:solidFill>
                   </a:tcPr>
                 </a:tc>
@@ -7974,7 +7977,7 @@
                   </a:txBody>
                   <a:tcPr>
                     <a:solidFill>
-                      <a:srgbClr val="F5F7FA"/>
+                      <a:srgbClr val="F0F8FF"/>
                     </a:solidFill>
                   </a:tcPr>
                 </a:tc>
@@ -8000,7 +8003,7 @@
                   </a:txBody>
                   <a:tcPr>
                     <a:solidFill>
-                      <a:srgbClr val="FFFFFF"/>
+                      <a:srgbClr val="F0F8FF"/>
                     </a:solidFill>
                   </a:tcPr>
                 </a:tc>
@@ -8019,7 +8022,7 @@
                   </a:txBody>
                   <a:tcPr>
                     <a:solidFill>
-                      <a:srgbClr val="FFFFFF"/>
+                      <a:srgbClr val="F0F8FF"/>
                     </a:solidFill>
                   </a:tcPr>
                 </a:tc>
@@ -8029,7 +8032,7 @@
                     <a:lstStyle/>
                     <a:p>
                       <a:r>
-                        <a:rPr sz="1000">
+                        <a:rPr sz="1000" dirty="0">
                           <a:latin typeface="Calibri"/>
                         </a:rPr>
                         <a:t>4.79</a:t>
@@ -8038,7 +8041,7 @@
                   </a:txBody>
                   <a:tcPr>
                     <a:solidFill>
-                      <a:srgbClr val="FFFFFF"/>
+                      <a:srgbClr val="F0F8FF"/>
                     </a:solidFill>
                   </a:tcPr>
                 </a:tc>
@@ -8057,7 +8060,7 @@
                   </a:txBody>
                   <a:tcPr>
                     <a:solidFill>
-                      <a:srgbClr val="FFFFFF"/>
+                      <a:srgbClr val="F0F8FF"/>
                     </a:solidFill>
                   </a:tcPr>
                 </a:tc>
@@ -8076,7 +8079,7 @@
                   </a:txBody>
                   <a:tcPr>
                     <a:solidFill>
-                      <a:srgbClr val="FFFFFF"/>
+                      <a:srgbClr val="F0F8FF"/>
                     </a:solidFill>
                   </a:tcPr>
                 </a:tc>
@@ -8102,7 +8105,7 @@
                   </a:txBody>
                   <a:tcPr>
                     <a:solidFill>
-                      <a:srgbClr val="F5F7FA"/>
+                      <a:srgbClr val="F0F8FF"/>
                     </a:solidFill>
                   </a:tcPr>
                 </a:tc>
@@ -8121,7 +8124,7 @@
                   </a:txBody>
                   <a:tcPr>
                     <a:solidFill>
-                      <a:srgbClr val="F5F7FA"/>
+                      <a:srgbClr val="F0F8FF"/>
                     </a:solidFill>
                   </a:tcPr>
                 </a:tc>
@@ -8131,7 +8134,7 @@
                     <a:lstStyle/>
                     <a:p>
                       <a:r>
-                        <a:rPr sz="1000">
+                        <a:rPr sz="1000" dirty="0">
                           <a:latin typeface="Calibri"/>
                         </a:rPr>
                         <a:t>18.19</a:t>
@@ -8140,7 +8143,7 @@
                   </a:txBody>
                   <a:tcPr>
                     <a:solidFill>
-                      <a:srgbClr val="F5F7FA"/>
+                      <a:srgbClr val="F0F8FF"/>
                     </a:solidFill>
                   </a:tcPr>
                 </a:tc>
@@ -8159,7 +8162,7 @@
                   </a:txBody>
                   <a:tcPr>
                     <a:solidFill>
-                      <a:srgbClr val="F5F7FA"/>
+                      <a:srgbClr val="F0F8FF"/>
                     </a:solidFill>
                   </a:tcPr>
                 </a:tc>
@@ -8178,7 +8181,7 @@
                   </a:txBody>
                   <a:tcPr>
                     <a:solidFill>
-                      <a:srgbClr val="F5F7FA"/>
+                      <a:srgbClr val="F0F8FF"/>
                     </a:solidFill>
                   </a:tcPr>
                 </a:tc>
@@ -8204,7 +8207,7 @@
                   </a:txBody>
                   <a:tcPr>
                     <a:solidFill>
-                      <a:srgbClr val="FFFFFF"/>
+                      <a:srgbClr val="F0F8FF"/>
                     </a:solidFill>
                   </a:tcPr>
                 </a:tc>
@@ -8226,7 +8229,7 @@
                   </a:txBody>
                   <a:tcPr>
                     <a:solidFill>
-                      <a:srgbClr val="FFFFFF"/>
+                      <a:srgbClr val="F0F8FF"/>
                     </a:solidFill>
                   </a:tcPr>
                 </a:tc>
@@ -8236,7 +8239,7 @@
                     <a:lstStyle/>
                     <a:p>
                       <a:r>
-                        <a:rPr sz="1000">
+                        <a:rPr sz="1000" dirty="0">
                           <a:latin typeface="Calibri"/>
                         </a:rPr>
                         <a:t>+2.69 dB</a:t>
@@ -8245,7 +8248,7 @@
                   </a:txBody>
                   <a:tcPr>
                     <a:solidFill>
-                      <a:srgbClr val="FFFFFF"/>
+                      <a:srgbClr val="F0F8FF"/>
                     </a:solidFill>
                   </a:tcPr>
                 </a:tc>
@@ -8264,7 +8267,7 @@
                   </a:txBody>
                   <a:tcPr>
                     <a:solidFill>
-                      <a:srgbClr val="FFFFFF"/>
+                      <a:srgbClr val="F0F8FF"/>
                     </a:solidFill>
                   </a:tcPr>
                 </a:tc>
@@ -8283,7 +8286,7 @@
                   </a:txBody>
                   <a:tcPr>
                     <a:solidFill>
-                      <a:srgbClr val="FFFFFF"/>
+                      <a:srgbClr val="F0F8FF"/>
                     </a:solidFill>
                   </a:tcPr>
                 </a:tc>
@@ -8310,7 +8313,7 @@
                   </a:txBody>
                   <a:tcPr>
                     <a:solidFill>
-                      <a:srgbClr val="F5F7FA"/>
+                      <a:srgbClr val="F0F8FF"/>
                     </a:solidFill>
                   </a:tcPr>
                 </a:tc>
@@ -8329,7 +8332,7 @@
                   </a:txBody>
                   <a:tcPr>
                     <a:solidFill>
-                      <a:srgbClr val="F5F7FA"/>
+                      <a:srgbClr val="F0F8FF"/>
                     </a:solidFill>
                   </a:tcPr>
                 </a:tc>
@@ -8348,7 +8351,7 @@
                   </a:txBody>
                   <a:tcPr>
                     <a:solidFill>
-                      <a:srgbClr val="F5F7FA"/>
+                      <a:srgbClr val="F0F8FF"/>
                     </a:solidFill>
                   </a:tcPr>
                 </a:tc>
@@ -8358,7 +8361,7 @@
                     <a:lstStyle/>
                     <a:p>
                       <a:r>
-                        <a:rPr sz="1000">
+                        <a:rPr sz="1000" dirty="0">
                           <a:latin typeface="Calibri"/>
                         </a:rPr>
                         <a:t>64 / 65.4</a:t>
@@ -8367,7 +8370,7 @@
                   </a:txBody>
                   <a:tcPr>
                     <a:solidFill>
-                      <a:srgbClr val="F5F7FA"/>
+                      <a:srgbClr val="F0F8FF"/>
                     </a:solidFill>
                   </a:tcPr>
                 </a:tc>
@@ -8386,7 +8389,7 @@
                   </a:txBody>
                   <a:tcPr>
                     <a:solidFill>
-                      <a:srgbClr val="F5F7FA"/>
+                      <a:srgbClr val="F0F8FF"/>
                     </a:solidFill>
                   </a:tcPr>
                 </a:tc>
@@ -8412,7 +8415,7 @@
                   </a:txBody>
                   <a:tcPr>
                     <a:solidFill>
-                      <a:srgbClr val="FFFFFF"/>
+                      <a:srgbClr val="F0F8FF"/>
                     </a:solidFill>
                   </a:tcPr>
                 </a:tc>
@@ -8431,7 +8434,7 @@
                   </a:txBody>
                   <a:tcPr>
                     <a:solidFill>
-                      <a:srgbClr val="FFFFFF"/>
+                      <a:srgbClr val="F0F8FF"/>
                     </a:solidFill>
                   </a:tcPr>
                 </a:tc>
@@ -8450,7 +8453,7 @@
                   </a:txBody>
                   <a:tcPr>
                     <a:solidFill>
-                      <a:srgbClr val="FFFFFF"/>
+                      <a:srgbClr val="F0F8FF"/>
                     </a:solidFill>
                   </a:tcPr>
                 </a:tc>
@@ -8469,7 +8472,7 @@
                   </a:txBody>
                   <a:tcPr>
                     <a:solidFill>
-                      <a:srgbClr val="FFFFFF"/>
+                      <a:srgbClr val="F0F8FF"/>
                     </a:solidFill>
                   </a:tcPr>
                 </a:tc>
@@ -8488,7 +8491,7 @@
                   </a:txBody>
                   <a:tcPr>
                     <a:solidFill>
-                      <a:srgbClr val="FFFFFF"/>
+                      <a:srgbClr val="F0F8FF"/>
                     </a:solidFill>
                   </a:tcPr>
                 </a:tc>
@@ -8514,7 +8517,7 @@
                   </a:txBody>
                   <a:tcPr>
                     <a:solidFill>
-                      <a:srgbClr val="F5F7FA"/>
+                      <a:srgbClr val="F0F8FF"/>
                     </a:solidFill>
                   </a:tcPr>
                 </a:tc>
@@ -8533,7 +8536,7 @@
                   </a:txBody>
                   <a:tcPr>
                     <a:solidFill>
-                      <a:srgbClr val="F5F7FA"/>
+                      <a:srgbClr val="F0F8FF"/>
                     </a:solidFill>
                   </a:tcPr>
                 </a:tc>
@@ -8552,7 +8555,7 @@
                   </a:txBody>
                   <a:tcPr>
                     <a:solidFill>
-                      <a:srgbClr val="F5F7FA"/>
+                      <a:srgbClr val="F0F8FF"/>
                     </a:solidFill>
                   </a:tcPr>
                 </a:tc>
@@ -8571,7 +8574,7 @@
                   </a:txBody>
                   <a:tcPr>
                     <a:solidFill>
-                      <a:srgbClr val="F5F7FA"/>
+                      <a:srgbClr val="F0F8FF"/>
                     </a:solidFill>
                   </a:tcPr>
                 </a:tc>
@@ -8590,7 +8593,7 @@
                   </a:txBody>
                   <a:tcPr>
                     <a:solidFill>
-                      <a:srgbClr val="F5F7FA"/>
+                      <a:srgbClr val="F0F8FF"/>
                     </a:solidFill>
                   </a:tcPr>
                 </a:tc>
@@ -8616,7 +8619,7 @@
                   </a:txBody>
                   <a:tcPr>
                     <a:solidFill>
-                      <a:srgbClr val="FFFFFF"/>
+                      <a:srgbClr val="F0F8FF"/>
                     </a:solidFill>
                   </a:tcPr>
                 </a:tc>
@@ -8635,7 +8638,7 @@
                   </a:txBody>
                   <a:tcPr>
                     <a:solidFill>
-                      <a:srgbClr val="FFFFFF"/>
+                      <a:srgbClr val="F0F8FF"/>
                     </a:solidFill>
                   </a:tcPr>
                 </a:tc>
@@ -8654,7 +8657,7 @@
                   </a:txBody>
                   <a:tcPr>
                     <a:solidFill>
-                      <a:srgbClr val="FFFFFF"/>
+                      <a:srgbClr val="F0F8FF"/>
                     </a:solidFill>
                   </a:tcPr>
                 </a:tc>
@@ -8673,7 +8676,7 @@
                   </a:txBody>
                   <a:tcPr>
                     <a:solidFill>
-                      <a:srgbClr val="FFFFFF"/>
+                      <a:srgbClr val="F0F8FF"/>
                     </a:solidFill>
                   </a:tcPr>
                 </a:tc>
@@ -8683,7 +8686,7 @@
                     <a:lstStyle/>
                     <a:p>
                       <a:r>
-                        <a:rPr sz="1000">
+                        <a:rPr sz="1000" dirty="0">
                           <a:latin typeface="Calibri"/>
                         </a:rPr>
                         <a:t>16</a:t>
@@ -8692,7 +8695,7 @@
                   </a:txBody>
                   <a:tcPr>
                     <a:solidFill>
-                      <a:srgbClr val="FFFFFF"/>
+                      <a:srgbClr val="F0F8FF"/>
                     </a:solidFill>
                   </a:tcPr>
                 </a:tc>
@@ -8718,7 +8721,7 @@
                   </a:txBody>
                   <a:tcPr>
                     <a:solidFill>
-                      <a:srgbClr val="F5F7FA"/>
+                      <a:srgbClr val="F0F8FF"/>
                     </a:solidFill>
                   </a:tcPr>
                 </a:tc>
@@ -8737,7 +8740,7 @@
                   </a:txBody>
                   <a:tcPr>
                     <a:solidFill>
-                      <a:srgbClr val="F5F7FA"/>
+                      <a:srgbClr val="F0F8FF"/>
                     </a:solidFill>
                   </a:tcPr>
                 </a:tc>
@@ -8756,7 +8759,7 @@
                   </a:txBody>
                   <a:tcPr>
                     <a:solidFill>
-                      <a:srgbClr val="F5F7FA"/>
+                      <a:srgbClr val="F0F8FF"/>
                     </a:solidFill>
                   </a:tcPr>
                 </a:tc>
@@ -8775,7 +8778,7 @@
                   </a:txBody>
                   <a:tcPr>
                     <a:solidFill>
-                      <a:srgbClr val="F5F7FA"/>
+                      <a:srgbClr val="F0F8FF"/>
                     </a:solidFill>
                   </a:tcPr>
                 </a:tc>
@@ -8794,7 +8797,7 @@
                   </a:txBody>
                   <a:tcPr>
                     <a:solidFill>
-                      <a:srgbClr val="F5F7FA"/>
+                      <a:srgbClr val="F0F8FF"/>
                     </a:solidFill>
                   </a:tcPr>
                 </a:tc>
@@ -9941,7 +9944,7 @@
           <p:nvPr>
             <p:extLst>
               <p:ext uri="{D42A27DB-BD31-4B8C-83A1-F6EECF244321}">
-                <p14:modId xmlns:p14="http://schemas.microsoft.com/office/powerpoint/2010/main" val="549698369"/>
+                <p14:modId xmlns:p14="http://schemas.microsoft.com/office/powerpoint/2010/main" val="1675330064"/>
               </p:ext>
             </p:extLst>
           </p:nvPr>
@@ -10097,7 +10100,7 @@
                   </a:txBody>
                   <a:tcPr>
                     <a:solidFill>
-                      <a:srgbClr val="F5F7FA"/>
+                      <a:srgbClr val="F0F8FF"/>
                     </a:solidFill>
                   </a:tcPr>
                 </a:tc>
@@ -10116,7 +10119,7 @@
                   </a:txBody>
                   <a:tcPr>
                     <a:solidFill>
-                      <a:srgbClr val="F5F7FA"/>
+                      <a:srgbClr val="F0F8FF"/>
                     </a:solidFill>
                   </a:tcPr>
                 </a:tc>
@@ -10135,7 +10138,7 @@
                   </a:txBody>
                   <a:tcPr>
                     <a:solidFill>
-                      <a:srgbClr val="F5F7FA"/>
+                      <a:srgbClr val="F0F8FF"/>
                     </a:solidFill>
                   </a:tcPr>
                 </a:tc>
@@ -10154,7 +10157,7 @@
                   </a:txBody>
                   <a:tcPr>
                     <a:solidFill>
-                      <a:srgbClr val="F5F7FA"/>
+                      <a:srgbClr val="F0F8FF"/>
                     </a:solidFill>
                   </a:tcPr>
                 </a:tc>
@@ -10180,7 +10183,7 @@
                   </a:txBody>
                   <a:tcPr>
                     <a:solidFill>
-                      <a:srgbClr val="FFFFFF"/>
+                      <a:srgbClr val="F0F8FF"/>
                     </a:solidFill>
                   </a:tcPr>
                 </a:tc>
@@ -10199,7 +10202,7 @@
                   </a:txBody>
                   <a:tcPr>
                     <a:solidFill>
-                      <a:srgbClr val="FFFFFF"/>
+                      <a:srgbClr val="F0F8FF"/>
                     </a:solidFill>
                   </a:tcPr>
                 </a:tc>
@@ -10218,7 +10221,7 @@
                   </a:txBody>
                   <a:tcPr>
                     <a:solidFill>
-                      <a:srgbClr val="FFFFFF"/>
+                      <a:srgbClr val="F0F8FF"/>
                     </a:solidFill>
                   </a:tcPr>
                 </a:tc>
@@ -10237,7 +10240,7 @@
                   </a:txBody>
                   <a:tcPr>
                     <a:solidFill>
-                      <a:srgbClr val="FFFFFF"/>
+                      <a:srgbClr val="F0F8FF"/>
                     </a:solidFill>
                   </a:tcPr>
                 </a:tc>
@@ -10263,7 +10266,7 @@
                   </a:txBody>
                   <a:tcPr>
                     <a:solidFill>
-                      <a:srgbClr val="F5F7FA"/>
+                      <a:srgbClr val="F0F8FF"/>
                     </a:solidFill>
                   </a:tcPr>
                 </a:tc>
@@ -10282,7 +10285,7 @@
                   </a:txBody>
                   <a:tcPr>
                     <a:solidFill>
-                      <a:srgbClr val="F5F7FA"/>
+                      <a:srgbClr val="F0F8FF"/>
                     </a:solidFill>
                   </a:tcPr>
                 </a:tc>
@@ -10301,7 +10304,7 @@
                   </a:txBody>
                   <a:tcPr>
                     <a:solidFill>
-                      <a:srgbClr val="F5F7FA"/>
+                      <a:srgbClr val="F0F8FF"/>
                     </a:solidFill>
                   </a:tcPr>
                 </a:tc>
@@ -10320,7 +10323,7 @@
                   </a:txBody>
                   <a:tcPr>
                     <a:solidFill>
-                      <a:srgbClr val="F5F7FA"/>
+                      <a:srgbClr val="F0F8FF"/>
                     </a:solidFill>
                   </a:tcPr>
                 </a:tc>
@@ -10346,7 +10349,7 @@
                   </a:txBody>
                   <a:tcPr>
                     <a:solidFill>
-                      <a:srgbClr val="FFFFFF"/>
+                      <a:srgbClr val="F0F8FF"/>
                     </a:solidFill>
                   </a:tcPr>
                 </a:tc>
@@ -10365,7 +10368,7 @@
                   </a:txBody>
                   <a:tcPr>
                     <a:solidFill>
-                      <a:srgbClr val="FFFFFF"/>
+                      <a:srgbClr val="F0F8FF"/>
                     </a:solidFill>
                   </a:tcPr>
                 </a:tc>
@@ -10384,7 +10387,7 @@
                   </a:txBody>
                   <a:tcPr>
                     <a:solidFill>
-                      <a:srgbClr val="FFFFFF"/>
+                      <a:srgbClr val="F0F8FF"/>
                     </a:solidFill>
                   </a:tcPr>
                 </a:tc>
@@ -10403,7 +10406,7 @@
                   </a:txBody>
                   <a:tcPr>
                     <a:solidFill>
-                      <a:srgbClr val="FFFFFF"/>
+                      <a:srgbClr val="F0F8FF"/>
                     </a:solidFill>
                   </a:tcPr>
                 </a:tc>
@@ -10429,7 +10432,7 @@
                   </a:txBody>
                   <a:tcPr>
                     <a:solidFill>
-                      <a:srgbClr val="F5F7FA"/>
+                      <a:srgbClr val="F0F8FF"/>
                     </a:solidFill>
                   </a:tcPr>
                 </a:tc>
@@ -10448,7 +10451,7 @@
                   </a:txBody>
                   <a:tcPr>
                     <a:solidFill>
-                      <a:srgbClr val="F5F7FA"/>
+                      <a:srgbClr val="F0F8FF"/>
                     </a:solidFill>
                   </a:tcPr>
                 </a:tc>
@@ -10467,7 +10470,7 @@
                   </a:txBody>
                   <a:tcPr>
                     <a:solidFill>
-                      <a:srgbClr val="F5F7FA"/>
+                      <a:srgbClr val="F0F8FF"/>
                     </a:solidFill>
                   </a:tcPr>
                 </a:tc>
@@ -10486,7 +10489,7 @@
                   </a:txBody>
                   <a:tcPr>
                     <a:solidFill>
-                      <a:srgbClr val="F5F7FA"/>
+                      <a:srgbClr val="F0F8FF"/>
                     </a:solidFill>
                   </a:tcPr>
                 </a:tc>
@@ -10531,57 +10534,39 @@
             <a:pPr algn="ctr"/>
             <a:r>
               <a:rPr sz="1400" b="0" i="0" dirty="0">
-                <a:solidFill>
-                  <a:srgbClr val="335577"/>
-                </a:solidFill>
-                <a:latin typeface="Calibri"/>
-              </a:rPr>
-              <a:t>Nb=8  ·  fs=50 MHz   </a:t>
+                <a:latin typeface="Calibri"/>
+              </a:rPr>
+              <a:t>Nb=8    fs=50 MHz   </a:t>
             </a:r>
             <a:r>
               <a:rPr lang="it-IT" sz="1400" b="0" i="0" dirty="0">
-                <a:solidFill>
-                  <a:srgbClr val="335577"/>
-                </a:solidFill>
                 <a:latin typeface="Calibri"/>
               </a:rPr>
               <a:t> </a:t>
             </a:r>
             <a:r>
               <a:rPr sz="1400" b="0" i="0" dirty="0" err="1">
-                <a:solidFill>
-                  <a:srgbClr val="335577"/>
-                </a:solidFill>
                 <a:latin typeface="Calibri"/>
               </a:rPr>
               <a:t>tclk</a:t>
             </a:r>
             <a:r>
               <a:rPr sz="1400" b="0" i="0" dirty="0">
-                <a:solidFill>
-                  <a:srgbClr val="335577"/>
-                </a:solidFill>
                 <a:latin typeface="Calibri"/>
               </a:rPr>
               <a:t>=20 ns    f₀=195.3 kHz    OVR=128    </a:t>
             </a:r>
             <a:r>
               <a:rPr sz="1400" b="0" i="0" dirty="0" err="1">
-                <a:solidFill>
-                  <a:srgbClr val="335577"/>
-                </a:solidFill>
                 <a:latin typeface="Calibri"/>
               </a:rPr>
               <a:t>SNR_input</a:t>
             </a:r>
             <a:r>
               <a:rPr sz="1400" b="0" i="0" dirty="0">
-                <a:solidFill>
-                  <a:srgbClr val="335577"/>
-                </a:solidFill>
-                <a:latin typeface="Calibri"/>
-              </a:rPr>
-              <a:t>=0 dB  ·  FS=256</a:t>
+                <a:latin typeface="Calibri"/>
+              </a:rPr>
+              <a:t>=0 dB    FS=256</a:t>
             </a:r>
           </a:p>
         </p:txBody>
@@ -11256,7 +11241,7 @@
             <a:avLst/>
           </a:prstGeom>
           <a:solidFill>
-            <a:srgbClr val="EBF4FB"/>
+            <a:srgbClr val="F0F8FF"/>
           </a:solidFill>
           <a:ln w="8890">
             <a:solidFill>
@@ -13167,7 +13152,7 @@
             <a:avLst/>
           </a:prstGeom>
           <a:solidFill>
-            <a:srgbClr val="EBF4FB"/>
+            <a:srgbClr val="F0F8FF"/>
           </a:solidFill>
           <a:ln w="8890">
             <a:solidFill>
@@ -14794,7 +14779,7 @@
             <a:avLst/>
           </a:prstGeom>
           <a:solidFill>
-            <a:srgbClr val="EBF4FB"/>
+            <a:srgbClr val="F0F8FF"/>
           </a:solidFill>
           <a:ln w="8890">
             <a:solidFill>
@@ -18329,14 +18314,6 @@
 </file>
 
 <file path=customXml/item1.xml><?xml version="1.0" encoding="utf-8"?>
-<p:properties xmlns:p="http://schemas.microsoft.com/office/2006/metadata/properties" xmlns:xsi="http://www.w3.org/2001/XMLSchema-instance" xmlns:pc="http://schemas.microsoft.com/office/infopath/2007/PartnerControls">
-  <documentManagement>
-    <_activity xmlns="d81608ca-db68-4891-9f53-9b89cbfff5c6" xsi:nil="true"/>
-  </documentManagement>
-</p:properties>
-</file>
-
-<file path=customXml/item2.xml><?xml version="1.0" encoding="utf-8"?>
 <ct:contentTypeSchema xmlns:ct="http://schemas.microsoft.com/office/2006/metadata/contentType" xmlns:ma="http://schemas.microsoft.com/office/2006/metadata/properties/metaAttributes" ct:_="" ma:_="" ma:contentTypeName="Documento" ma:contentTypeID="0x01010009A656CF8C467741A56A16B7574AC68E" ma:contentTypeVersion="12" ma:contentTypeDescription="Creare un nuovo documento." ma:contentTypeScope="" ma:versionID="4f27b0f6ef663e5da5bafac1efc6fe9a">
   <xsd:schema xmlns:xsd="http://www.w3.org/2001/XMLSchema" xmlns:xs="http://www.w3.org/2001/XMLSchema" xmlns:p="http://schemas.microsoft.com/office/2006/metadata/properties" xmlns:ns3="d81608ca-db68-4891-9f53-9b89cbfff5c6" xmlns:ns4="be3c09a5-e964-4602-bd74-bbf48e0fabf1" targetNamespace="http://schemas.microsoft.com/office/2006/metadata/properties" ma:root="true" ma:fieldsID="8a6d6b69e42fa993b1c0a33dd1bd5a45" ns3:_="" ns4:_="">
     <xsd:import namespace="d81608ca-db68-4891-9f53-9b89cbfff5c6"/>
@@ -18551,6 +18528,14 @@
 </ct:contentTypeSchema>
 </file>
 
+<file path=customXml/item2.xml><?xml version="1.0" encoding="utf-8"?>
+<p:properties xmlns:p="http://schemas.microsoft.com/office/2006/metadata/properties" xmlns:xsi="http://www.w3.org/2001/XMLSchema-instance" xmlns:pc="http://schemas.microsoft.com/office/infopath/2007/PartnerControls">
+  <documentManagement>
+    <_activity xmlns="d81608ca-db68-4891-9f53-9b89cbfff5c6" xsi:nil="true"/>
+  </documentManagement>
+</p:properties>
+</file>
+
 <file path=customXml/item3.xml><?xml version="1.0" encoding="utf-8"?>
 <?mso-contentType ?>
 <FormTemplates xmlns="http://schemas.microsoft.com/sharepoint/v3/contenttype/forms">
@@ -18561,23 +18546,6 @@
 </file>
 
 <file path=customXml/itemProps1.xml><?xml version="1.0" encoding="utf-8"?>
-<ds:datastoreItem xmlns:ds="http://schemas.openxmlformats.org/officeDocument/2006/customXml" ds:itemID="{3F5952B0-BE3F-4397-8C49-DFA106167C99}">
-  <ds:schemaRefs>
-    <ds:schemaRef ds:uri="http://schemas.microsoft.com/office/2006/documentManagement/types"/>
-    <ds:schemaRef ds:uri="http://schemas.microsoft.com/office/infopath/2007/PartnerControls"/>
-    <ds:schemaRef ds:uri="http://purl.org/dc/terms/"/>
-    <ds:schemaRef ds:uri="http://purl.org/dc/dcmitype/"/>
-    <ds:schemaRef ds:uri="http://schemas.openxmlformats.org/package/2006/metadata/core-properties"/>
-    <ds:schemaRef ds:uri="be3c09a5-e964-4602-bd74-bbf48e0fabf1"/>
-    <ds:schemaRef ds:uri="d81608ca-db68-4891-9f53-9b89cbfff5c6"/>
-    <ds:schemaRef ds:uri="http://www.w3.org/XML/1998/namespace"/>
-    <ds:schemaRef ds:uri="http://schemas.microsoft.com/office/2006/metadata/properties"/>
-    <ds:schemaRef ds:uri="http://purl.org/dc/elements/1.1/"/>
-  </ds:schemaRefs>
-</ds:datastoreItem>
-</file>
-
-<file path=customXml/itemProps2.xml><?xml version="1.0" encoding="utf-8"?>
 <ds:datastoreItem xmlns:ds="http://schemas.openxmlformats.org/officeDocument/2006/customXml" ds:itemID="{AC7A1D52-4C7C-4BE2-BA1D-9D952C857EA1}">
   <ds:schemaRefs>
     <ds:schemaRef ds:uri="http://schemas.microsoft.com/office/2006/metadata/contentType"/>
@@ -18596,6 +18564,23 @@
 </ds:datastoreItem>
 </file>
 
+<file path=customXml/itemProps2.xml><?xml version="1.0" encoding="utf-8"?>
+<ds:datastoreItem xmlns:ds="http://schemas.openxmlformats.org/officeDocument/2006/customXml" ds:itemID="{3F5952B0-BE3F-4397-8C49-DFA106167C99}">
+  <ds:schemaRefs>
+    <ds:schemaRef ds:uri="http://schemas.microsoft.com/office/2006/documentManagement/types"/>
+    <ds:schemaRef ds:uri="http://schemas.microsoft.com/office/infopath/2007/PartnerControls"/>
+    <ds:schemaRef ds:uri="http://purl.org/dc/terms/"/>
+    <ds:schemaRef ds:uri="http://purl.org/dc/dcmitype/"/>
+    <ds:schemaRef ds:uri="http://schemas.openxmlformats.org/package/2006/metadata/core-properties"/>
+    <ds:schemaRef ds:uri="be3c09a5-e964-4602-bd74-bbf48e0fabf1"/>
+    <ds:schemaRef ds:uri="d81608ca-db68-4891-9f53-9b89cbfff5c6"/>
+    <ds:schemaRef ds:uri="http://www.w3.org/XML/1998/namespace"/>
+    <ds:schemaRef ds:uri="http://schemas.microsoft.com/office/2006/metadata/properties"/>
+    <ds:schemaRef ds:uri="http://purl.org/dc/elements/1.1/"/>
+  </ds:schemaRefs>
+</ds:datastoreItem>
+</file>
+
 <file path=customXml/itemProps3.xml><?xml version="1.0" encoding="utf-8"?>
 <ds:datastoreItem xmlns:ds="http://schemas.openxmlformats.org/officeDocument/2006/customXml" ds:itemID="{6E8D78F2-F211-4F79-8A63-15AEAF64F23A}">
   <ds:schemaRefs>

--- a/DocumentazioneDiProgetto_ElHanafi.pptx
+++ b/DocumentazioneDiProgetto_ElHanafi.pptx
@@ -9182,753 +9182,6 @@
           </a:p>
         </p:txBody>
       </p:sp>
-      <p:sp>
-        <p:nvSpPr>
-          <p:cNvPr id="11" name="Rectangle 10">
-            <a:extLst>
-              <a:ext uri="{FF2B5EF4-FFF2-40B4-BE49-F238E27FC236}">
-                <a16:creationId xmlns:a16="http://schemas.microsoft.com/office/drawing/2014/main" id="{3EE6DCD7-318B-B7D5-9373-953EA8B58AA3}"/>
-              </a:ext>
-            </a:extLst>
-          </p:cNvPr>
-          <p:cNvSpPr/>
-          <p:nvPr/>
-        </p:nvSpPr>
-        <p:spPr bwMode="auto">
-          <a:xfrm>
-            <a:off x="747717" y="1268760"/>
-            <a:ext cx="10696566" cy="4680520"/>
-          </a:xfrm>
-          <a:prstGeom prst="rect">
-            <a:avLst/>
-          </a:prstGeom>
-          <a:solidFill>
-            <a:schemeClr val="bg1">
-              <a:lumMod val="95000"/>
-            </a:schemeClr>
-          </a:solidFill>
-          <a:ln w="9525" cap="flat" cmpd="sng" algn="ctr">
-            <a:solidFill>
-              <a:schemeClr val="tx1"/>
-            </a:solidFill>
-            <a:prstDash val="solid"/>
-            <a:round/>
-            <a:headEnd type="none" w="med" len="med"/>
-            <a:tailEnd type="none" w="med" len="med"/>
-          </a:ln>
-          <a:effectLst/>
-        </p:spPr>
-        <p:txBody>
-          <a:bodyPr vert="horz" wrap="square" lIns="91440" tIns="45720" rIns="91440" bIns="45720" numCol="1" rtlCol="0" anchor="t" anchorCtr="0" compatLnSpc="1">
-            <a:prstTxWarp prst="textNoShape">
-              <a:avLst/>
-            </a:prstTxWarp>
-          </a:bodyPr>
-          <a:lstStyle/>
-          <a:p>
-            <a:pPr marL="469900" marR="0" indent="-469900" algn="l" defTabSz="914400" rtl="0" eaLnBrk="1" fontAlgn="base" latinLnBrk="0" hangingPunct="1">
-              <a:lnSpc>
-                <a:spcPct val="90000"/>
-              </a:lnSpc>
-              <a:spcBef>
-                <a:spcPct val="20000"/>
-              </a:spcBef>
-              <a:spcAft>
-                <a:spcPct val="0"/>
-              </a:spcAft>
-              <a:buClr>
-                <a:schemeClr val="accent2"/>
-              </a:buClr>
-              <a:buSzTx/>
-              <a:buFont typeface="Wingdings" pitchFamily="2" charset="2"/>
-              <a:buChar char="o"/>
-              <a:tabLst/>
-            </a:pPr>
-            <a:endParaRPr kumimoji="0" lang="en-GB" sz="2000" b="0" i="0" u="none" strike="noStrike" cap="none" normalizeH="0" baseline="0">
-              <a:ln>
-                <a:noFill/>
-              </a:ln>
-              <a:solidFill>
-                <a:schemeClr val="tx1"/>
-              </a:solidFill>
-              <a:effectLst/>
-              <a:latin typeface="Verdana" pitchFamily="34" charset="0"/>
-              <a:ea typeface="ＭＳ Ｐゴシック" pitchFamily="50" charset="-128"/>
-            </a:endParaRPr>
-          </a:p>
-        </p:txBody>
-      </p:sp>
-      <p:sp>
-        <p:nvSpPr>
-          <p:cNvPr id="3" name="TextBox 11">
-            <a:extLst>
-              <a:ext uri="{FF2B5EF4-FFF2-40B4-BE49-F238E27FC236}">
-                <a16:creationId xmlns:a16="http://schemas.microsoft.com/office/drawing/2014/main" id="{E23614E8-7D78-F808-A29A-561E3096BA0A}"/>
-              </a:ext>
-            </a:extLst>
-          </p:cNvPr>
-          <p:cNvSpPr txBox="1"/>
-          <p:nvPr/>
-        </p:nvSpPr>
-        <p:spPr>
-          <a:xfrm>
-            <a:off x="1311050" y="1666081"/>
-            <a:ext cx="1188720" cy="276999"/>
-          </a:xfrm>
-          <a:prstGeom prst="rect">
-            <a:avLst/>
-          </a:prstGeom>
-          <a:noFill/>
-        </p:spPr>
-        <p:txBody>
-          <a:bodyPr wrap="square">
-            <a:spAutoFit/>
-          </a:bodyPr>
-          <a:lstStyle/>
-          <a:p>
-            <a:pPr algn="l"/>
-            <a:r>
-              <a:rPr lang="it-IT" sz="900" dirty="0">
-                <a:solidFill>
-                  <a:srgbClr val="333333"/>
-                </a:solidFill>
-                <a:latin typeface="Calibri"/>
-              </a:rPr>
-              <a:t> </a:t>
-            </a:r>
-            <a:r>
-              <a:rPr lang="it-IT" sz="900" b="0" i="0" dirty="0">
-                <a:solidFill>
-                  <a:srgbClr val="333333"/>
-                </a:solidFill>
-                <a:latin typeface="Calibri"/>
-              </a:rPr>
-              <a:t> </a:t>
-            </a:r>
-            <a:r>
-              <a:rPr sz="1200" b="0" i="0" dirty="0" err="1">
-                <a:solidFill>
-                  <a:srgbClr val="333333"/>
-                </a:solidFill>
-                <a:latin typeface="Calibri"/>
-              </a:rPr>
-              <a:t>dfilter_input</a:t>
-            </a:r>
-            <a:r>
-              <a:rPr sz="1200" b="0" i="0" dirty="0">
-                <a:solidFill>
-                  <a:srgbClr val="333333"/>
-                </a:solidFill>
-                <a:latin typeface="Calibri"/>
-              </a:rPr>
-              <a:t> →</a:t>
-            </a:r>
-          </a:p>
-        </p:txBody>
-      </p:sp>
-      <p:sp>
-        <p:nvSpPr>
-          <p:cNvPr id="6" name="Rectangle 12">
-            <a:extLst>
-              <a:ext uri="{FF2B5EF4-FFF2-40B4-BE49-F238E27FC236}">
-                <a16:creationId xmlns:a16="http://schemas.microsoft.com/office/drawing/2014/main" id="{3C5C52DE-5F1E-6309-1BA2-357107A5EA3A}"/>
-              </a:ext>
-            </a:extLst>
-          </p:cNvPr>
-          <p:cNvSpPr/>
-          <p:nvPr/>
-        </p:nvSpPr>
-        <p:spPr>
-          <a:xfrm>
-            <a:off x="2509309" y="1522456"/>
-            <a:ext cx="1554480" cy="594360"/>
-          </a:xfrm>
-          <a:prstGeom prst="rect">
-            <a:avLst/>
-          </a:prstGeom>
-          <a:solidFill>
-            <a:srgbClr val="0070C0"/>
-          </a:solidFill>
-          <a:ln w="15240">
-            <a:solidFill>
-              <a:srgbClr val="000080"/>
-            </a:solidFill>
-          </a:ln>
-        </p:spPr>
-        <p:style>
-          <a:lnRef idx="1">
-            <a:schemeClr val="accent1"/>
-          </a:lnRef>
-          <a:fillRef idx="3">
-            <a:schemeClr val="accent1"/>
-          </a:fillRef>
-          <a:effectRef idx="2">
-            <a:schemeClr val="accent1"/>
-          </a:effectRef>
-          <a:fontRef idx="minor">
-            <a:schemeClr val="lt1"/>
-          </a:fontRef>
-        </p:style>
-        <p:txBody>
-          <a:bodyPr rtlCol="0" anchor="ctr"/>
-          <a:lstStyle/>
-          <a:p>
-            <a:pPr algn="ctr"/>
-            <a:endParaRPr/>
-          </a:p>
-        </p:txBody>
-      </p:sp>
-      <p:sp>
-        <p:nvSpPr>
-          <p:cNvPr id="7" name="TextBox 13">
-            <a:extLst>
-              <a:ext uri="{FF2B5EF4-FFF2-40B4-BE49-F238E27FC236}">
-                <a16:creationId xmlns:a16="http://schemas.microsoft.com/office/drawing/2014/main" id="{01DC63C8-A0B1-EF92-3E59-54002308A882}"/>
-              </a:ext>
-            </a:extLst>
-          </p:cNvPr>
-          <p:cNvSpPr txBox="1"/>
-          <p:nvPr/>
-        </p:nvSpPr>
-        <p:spPr>
-          <a:xfrm>
-            <a:off x="2555029" y="1568176"/>
-            <a:ext cx="1463040" cy="502920"/>
-          </a:xfrm>
-          <a:prstGeom prst="rect">
-            <a:avLst/>
-          </a:prstGeom>
-          <a:noFill/>
-        </p:spPr>
-        <p:txBody>
-          <a:bodyPr wrap="square">
-            <a:spAutoFit/>
-          </a:bodyPr>
-          <a:lstStyle/>
-          <a:p>
-            <a:pPr algn="ctr"/>
-            <a:r>
-              <a:rPr sz="950" b="1" i="0">
-                <a:solidFill>
-                  <a:srgbClr val="FFFFFF"/>
-                </a:solidFill>
-                <a:latin typeface="Calibri"/>
-              </a:rPr>
-              <a:t>FIFO
-(delay line)</a:t>
-            </a:r>
-          </a:p>
-        </p:txBody>
-      </p:sp>
-      <p:sp>
-        <p:nvSpPr>
-          <p:cNvPr id="8" name="TextBox 14">
-            <a:extLst>
-              <a:ext uri="{FF2B5EF4-FFF2-40B4-BE49-F238E27FC236}">
-                <a16:creationId xmlns:a16="http://schemas.microsoft.com/office/drawing/2014/main" id="{86ECD448-9473-88A3-093C-522A0403BA98}"/>
-              </a:ext>
-            </a:extLst>
-          </p:cNvPr>
-          <p:cNvSpPr txBox="1"/>
-          <p:nvPr/>
-        </p:nvSpPr>
-        <p:spPr>
-          <a:xfrm>
-            <a:off x="4063789" y="1687048"/>
-            <a:ext cx="320040" cy="256032"/>
-          </a:xfrm>
-          <a:prstGeom prst="rect">
-            <a:avLst/>
-          </a:prstGeom>
-          <a:noFill/>
-        </p:spPr>
-        <p:txBody>
-          <a:bodyPr wrap="square">
-            <a:spAutoFit/>
-          </a:bodyPr>
-          <a:lstStyle/>
-          <a:p>
-            <a:pPr algn="l"/>
-            <a:r>
-              <a:rPr sz="1200" b="1" i="0" dirty="0">
-                <a:solidFill>
-                  <a:srgbClr val="003366"/>
-                </a:solidFill>
-                <a:latin typeface="Calibri"/>
-              </a:rPr>
-              <a:t>→</a:t>
-            </a:r>
-          </a:p>
-        </p:txBody>
-      </p:sp>
-      <p:sp>
-        <p:nvSpPr>
-          <p:cNvPr id="10" name="Rectangle 15">
-            <a:extLst>
-              <a:ext uri="{FF2B5EF4-FFF2-40B4-BE49-F238E27FC236}">
-                <a16:creationId xmlns:a16="http://schemas.microsoft.com/office/drawing/2014/main" id="{7DD6E847-0138-F53B-E989-A61F259D54A3}"/>
-              </a:ext>
-            </a:extLst>
-          </p:cNvPr>
-          <p:cNvSpPr/>
-          <p:nvPr/>
-        </p:nvSpPr>
-        <p:spPr>
-          <a:xfrm>
-            <a:off x="4338109" y="1522456"/>
-            <a:ext cx="1554480" cy="594360"/>
-          </a:xfrm>
-          <a:prstGeom prst="rect">
-            <a:avLst/>
-          </a:prstGeom>
-          <a:solidFill>
-            <a:srgbClr val="0070C0"/>
-          </a:solidFill>
-          <a:ln w="15240">
-            <a:solidFill>
-              <a:srgbClr val="000080"/>
-            </a:solidFill>
-          </a:ln>
-        </p:spPr>
-        <p:style>
-          <a:lnRef idx="1">
-            <a:schemeClr val="accent1"/>
-          </a:lnRef>
-          <a:fillRef idx="3">
-            <a:schemeClr val="accent1"/>
-          </a:fillRef>
-          <a:effectRef idx="2">
-            <a:schemeClr val="accent1"/>
-          </a:effectRef>
-          <a:fontRef idx="minor">
-            <a:schemeClr val="lt1"/>
-          </a:fontRef>
-        </p:style>
-        <p:txBody>
-          <a:bodyPr rtlCol="0" anchor="ctr"/>
-          <a:lstStyle/>
-          <a:p>
-            <a:pPr algn="ctr"/>
-            <a:endParaRPr/>
-          </a:p>
-        </p:txBody>
-      </p:sp>
-      <p:sp>
-        <p:nvSpPr>
-          <p:cNvPr id="12" name="TextBox 16">
-            <a:extLst>
-              <a:ext uri="{FF2B5EF4-FFF2-40B4-BE49-F238E27FC236}">
-                <a16:creationId xmlns:a16="http://schemas.microsoft.com/office/drawing/2014/main" id="{336E5211-6295-734E-8EEA-3B371D1C39D6}"/>
-              </a:ext>
-            </a:extLst>
-          </p:cNvPr>
-          <p:cNvSpPr txBox="1"/>
-          <p:nvPr/>
-        </p:nvSpPr>
-        <p:spPr>
-          <a:xfrm>
-            <a:off x="4383829" y="1568176"/>
-            <a:ext cx="1463040" cy="502920"/>
-          </a:xfrm>
-          <a:prstGeom prst="rect">
-            <a:avLst/>
-          </a:prstGeom>
-          <a:noFill/>
-        </p:spPr>
-        <p:txBody>
-          <a:bodyPr wrap="square">
-            <a:spAutoFit/>
-          </a:bodyPr>
-          <a:lstStyle/>
-          <a:p>
-            <a:pPr algn="ctr"/>
-            <a:r>
-              <a:rPr sz="950" b="1" i="0">
-                <a:solidFill>
-                  <a:srgbClr val="FFFFFF"/>
-                </a:solidFill>
-                <a:latin typeface="Calibri"/>
-              </a:rPr>
-              <a:t>Multiadder</a:t>
-            </a:r>
-          </a:p>
-        </p:txBody>
-      </p:sp>
-      <p:sp>
-        <p:nvSpPr>
-          <p:cNvPr id="13" name="TextBox 17">
-            <a:extLst>
-              <a:ext uri="{FF2B5EF4-FFF2-40B4-BE49-F238E27FC236}">
-                <a16:creationId xmlns:a16="http://schemas.microsoft.com/office/drawing/2014/main" id="{B4297C27-6333-3C95-9AA3-861367FC48C2}"/>
-              </a:ext>
-            </a:extLst>
-          </p:cNvPr>
-          <p:cNvSpPr txBox="1"/>
-          <p:nvPr/>
-        </p:nvSpPr>
-        <p:spPr>
-          <a:xfrm>
-            <a:off x="5892589" y="1687048"/>
-            <a:ext cx="320040" cy="256032"/>
-          </a:xfrm>
-          <a:prstGeom prst="rect">
-            <a:avLst/>
-          </a:prstGeom>
-          <a:noFill/>
-        </p:spPr>
-        <p:txBody>
-          <a:bodyPr wrap="square">
-            <a:spAutoFit/>
-          </a:bodyPr>
-          <a:lstStyle/>
-          <a:p>
-            <a:pPr algn="l"/>
-            <a:r>
-              <a:rPr sz="1200" b="1" i="0">
-                <a:solidFill>
-                  <a:srgbClr val="003366"/>
-                </a:solidFill>
-                <a:latin typeface="Calibri"/>
-              </a:rPr>
-              <a:t>→</a:t>
-            </a:r>
-          </a:p>
-        </p:txBody>
-      </p:sp>
-      <p:sp>
-        <p:nvSpPr>
-          <p:cNvPr id="14" name="Rectangle 18">
-            <a:extLst>
-              <a:ext uri="{FF2B5EF4-FFF2-40B4-BE49-F238E27FC236}">
-                <a16:creationId xmlns:a16="http://schemas.microsoft.com/office/drawing/2014/main" id="{5A46DB90-1F91-130F-C389-A026D4206EDA}"/>
-              </a:ext>
-            </a:extLst>
-          </p:cNvPr>
-          <p:cNvSpPr/>
-          <p:nvPr/>
-        </p:nvSpPr>
-        <p:spPr>
-          <a:xfrm>
-            <a:off x="6166909" y="1522456"/>
-            <a:ext cx="1554480" cy="594360"/>
-          </a:xfrm>
-          <a:prstGeom prst="rect">
-            <a:avLst/>
-          </a:prstGeom>
-          <a:solidFill>
-            <a:srgbClr val="0070C0"/>
-          </a:solidFill>
-          <a:ln w="15240">
-            <a:solidFill>
-              <a:srgbClr val="000080"/>
-            </a:solidFill>
-          </a:ln>
-        </p:spPr>
-        <p:style>
-          <a:lnRef idx="1">
-            <a:schemeClr val="accent1"/>
-          </a:lnRef>
-          <a:fillRef idx="3">
-            <a:schemeClr val="accent1"/>
-          </a:fillRef>
-          <a:effectRef idx="2">
-            <a:schemeClr val="accent1"/>
-          </a:effectRef>
-          <a:fontRef idx="minor">
-            <a:schemeClr val="lt1"/>
-          </a:fontRef>
-        </p:style>
-        <p:txBody>
-          <a:bodyPr rtlCol="0" anchor="ctr"/>
-          <a:lstStyle/>
-          <a:p>
-            <a:pPr algn="ctr"/>
-            <a:endParaRPr/>
-          </a:p>
-        </p:txBody>
-      </p:sp>
-      <p:sp>
-        <p:nvSpPr>
-          <p:cNvPr id="15" name="TextBox 19">
-            <a:extLst>
-              <a:ext uri="{FF2B5EF4-FFF2-40B4-BE49-F238E27FC236}">
-                <a16:creationId xmlns:a16="http://schemas.microsoft.com/office/drawing/2014/main" id="{B9097EDF-C2A4-09BE-437C-441963A5EDD8}"/>
-              </a:ext>
-            </a:extLst>
-          </p:cNvPr>
-          <p:cNvSpPr txBox="1"/>
-          <p:nvPr/>
-        </p:nvSpPr>
-        <p:spPr>
-          <a:xfrm>
-            <a:off x="6212629" y="1568176"/>
-            <a:ext cx="1463040" cy="502920"/>
-          </a:xfrm>
-          <a:prstGeom prst="rect">
-            <a:avLst/>
-          </a:prstGeom>
-          <a:noFill/>
-        </p:spPr>
-        <p:txBody>
-          <a:bodyPr wrap="square">
-            <a:spAutoFit/>
-          </a:bodyPr>
-          <a:lstStyle/>
-          <a:p>
-            <a:pPr algn="ctr"/>
-            <a:r>
-              <a:rPr sz="950" b="1" i="0" dirty="0">
-                <a:solidFill>
-                  <a:srgbClr val="FFFFFF"/>
-                </a:solidFill>
-                <a:latin typeface="Calibri"/>
-              </a:rPr>
-              <a:t>Accumulator</a:t>
-            </a:r>
-          </a:p>
-        </p:txBody>
-      </p:sp>
-      <p:sp>
-        <p:nvSpPr>
-          <p:cNvPr id="16" name="TextBox 20">
-            <a:extLst>
-              <a:ext uri="{FF2B5EF4-FFF2-40B4-BE49-F238E27FC236}">
-                <a16:creationId xmlns:a16="http://schemas.microsoft.com/office/drawing/2014/main" id="{FD3C8BBC-658D-33D0-FAE3-589372411DD1}"/>
-              </a:ext>
-            </a:extLst>
-          </p:cNvPr>
-          <p:cNvSpPr txBox="1"/>
-          <p:nvPr/>
-        </p:nvSpPr>
-        <p:spPr>
-          <a:xfrm>
-            <a:off x="7721389" y="1687048"/>
-            <a:ext cx="320040" cy="256032"/>
-          </a:xfrm>
-          <a:prstGeom prst="rect">
-            <a:avLst/>
-          </a:prstGeom>
-          <a:noFill/>
-        </p:spPr>
-        <p:txBody>
-          <a:bodyPr wrap="square">
-            <a:spAutoFit/>
-          </a:bodyPr>
-          <a:lstStyle/>
-          <a:p>
-            <a:pPr algn="l"/>
-            <a:r>
-              <a:rPr sz="1200" b="1" i="0">
-                <a:solidFill>
-                  <a:srgbClr val="003366"/>
-                </a:solidFill>
-                <a:latin typeface="Calibri"/>
-              </a:rPr>
-              <a:t>→</a:t>
-            </a:r>
-          </a:p>
-        </p:txBody>
-      </p:sp>
-      <p:sp>
-        <p:nvSpPr>
-          <p:cNvPr id="17" name="Rectangle 21">
-            <a:extLst>
-              <a:ext uri="{FF2B5EF4-FFF2-40B4-BE49-F238E27FC236}">
-                <a16:creationId xmlns:a16="http://schemas.microsoft.com/office/drawing/2014/main" id="{3B996005-7230-40F0-DAA0-66DC61DD4487}"/>
-              </a:ext>
-            </a:extLst>
-          </p:cNvPr>
-          <p:cNvSpPr/>
-          <p:nvPr/>
-        </p:nvSpPr>
-        <p:spPr>
-          <a:xfrm>
-            <a:off x="8026561" y="1522456"/>
-            <a:ext cx="1554480" cy="594360"/>
-          </a:xfrm>
-          <a:prstGeom prst="rect">
-            <a:avLst/>
-          </a:prstGeom>
-          <a:solidFill>
-            <a:srgbClr val="0070C0"/>
-          </a:solidFill>
-          <a:ln w="15240">
-            <a:solidFill>
-              <a:srgbClr val="000080"/>
-            </a:solidFill>
-          </a:ln>
-        </p:spPr>
-        <p:style>
-          <a:lnRef idx="1">
-            <a:schemeClr val="accent1"/>
-          </a:lnRef>
-          <a:fillRef idx="3">
-            <a:schemeClr val="accent1"/>
-          </a:fillRef>
-          <a:effectRef idx="2">
-            <a:schemeClr val="accent1"/>
-          </a:effectRef>
-          <a:fontRef idx="minor">
-            <a:schemeClr val="lt1"/>
-          </a:fontRef>
-        </p:style>
-        <p:txBody>
-          <a:bodyPr rtlCol="0" anchor="ctr"/>
-          <a:lstStyle/>
-          <a:p>
-            <a:pPr algn="ctr"/>
-            <a:endParaRPr/>
-          </a:p>
-        </p:txBody>
-      </p:sp>
-      <p:sp>
-        <p:nvSpPr>
-          <p:cNvPr id="18" name="TextBox 22">
-            <a:extLst>
-              <a:ext uri="{FF2B5EF4-FFF2-40B4-BE49-F238E27FC236}">
-                <a16:creationId xmlns:a16="http://schemas.microsoft.com/office/drawing/2014/main" id="{62656BF5-6B5F-BCA5-D665-6EE6F0503E7F}"/>
-              </a:ext>
-            </a:extLst>
-          </p:cNvPr>
-          <p:cNvSpPr txBox="1"/>
-          <p:nvPr/>
-        </p:nvSpPr>
-        <p:spPr>
-          <a:xfrm>
-            <a:off x="8072281" y="1568176"/>
-            <a:ext cx="1463040" cy="502920"/>
-          </a:xfrm>
-          <a:prstGeom prst="rect">
-            <a:avLst/>
-          </a:prstGeom>
-          <a:noFill/>
-        </p:spPr>
-        <p:txBody>
-          <a:bodyPr wrap="square">
-            <a:spAutoFit/>
-          </a:bodyPr>
-          <a:lstStyle/>
-          <a:p>
-            <a:pPr algn="ctr"/>
-            <a:r>
-              <a:rPr sz="950" b="1" i="0">
-                <a:solidFill>
-                  <a:srgbClr val="FFFFFF"/>
-                </a:solidFill>
-                <a:latin typeface="Calibri"/>
-              </a:rPr>
-              <a:t>divide_by
-÷NFIFO</a:t>
-            </a:r>
-          </a:p>
-        </p:txBody>
-      </p:sp>
-      <p:sp>
-        <p:nvSpPr>
-          <p:cNvPr id="20" name="TextBox 23">
-            <a:extLst>
-              <a:ext uri="{FF2B5EF4-FFF2-40B4-BE49-F238E27FC236}">
-                <a16:creationId xmlns:a16="http://schemas.microsoft.com/office/drawing/2014/main" id="{0A748048-2780-A801-925B-0265B7759B74}"/>
-              </a:ext>
-            </a:extLst>
-          </p:cNvPr>
-          <p:cNvSpPr txBox="1"/>
-          <p:nvPr/>
-        </p:nvSpPr>
-        <p:spPr>
-          <a:xfrm>
-            <a:off x="9626761" y="1666080"/>
-            <a:ext cx="1371600" cy="276999"/>
-          </a:xfrm>
-          <a:prstGeom prst="rect">
-            <a:avLst/>
-          </a:prstGeom>
-          <a:noFill/>
-        </p:spPr>
-        <p:txBody>
-          <a:bodyPr wrap="square">
-            <a:spAutoFit/>
-          </a:bodyPr>
-          <a:lstStyle/>
-          <a:p>
-            <a:pPr algn="l"/>
-            <a:r>
-              <a:rPr sz="1200" b="0" i="0" dirty="0">
-                <a:solidFill>
-                  <a:srgbClr val="333333"/>
-                </a:solidFill>
-                <a:latin typeface="Calibri"/>
-              </a:rPr>
-              <a:t>→ </a:t>
-            </a:r>
-            <a:r>
-              <a:rPr sz="1200" b="0" i="0" dirty="0" err="1">
-                <a:solidFill>
-                  <a:srgbClr val="333333"/>
-                </a:solidFill>
-                <a:latin typeface="Calibri"/>
-              </a:rPr>
-              <a:t>dfilter_output</a:t>
-            </a:r>
-            <a:endParaRPr sz="1200" b="0" i="0" dirty="0">
-              <a:solidFill>
-                <a:srgbClr val="333333"/>
-              </a:solidFill>
-              <a:latin typeface="Calibri"/>
-            </a:endParaRPr>
-          </a:p>
-        </p:txBody>
-      </p:sp>
-      <p:sp>
-        <p:nvSpPr>
-          <p:cNvPr id="21" name="TextBox 27">
-            <a:extLst>
-              <a:ext uri="{FF2B5EF4-FFF2-40B4-BE49-F238E27FC236}">
-                <a16:creationId xmlns:a16="http://schemas.microsoft.com/office/drawing/2014/main" id="{142D2177-50E5-DDA3-BCC4-EC44AC40060A}"/>
-              </a:ext>
-            </a:extLst>
-          </p:cNvPr>
-          <p:cNvSpPr txBox="1"/>
-          <p:nvPr/>
-        </p:nvSpPr>
-        <p:spPr>
-          <a:xfrm>
-            <a:off x="3709131" y="2313546"/>
-            <a:ext cx="4275475" cy="307777"/>
-          </a:xfrm>
-          <a:prstGeom prst="rect">
-            <a:avLst/>
-          </a:prstGeom>
-          <a:noFill/>
-        </p:spPr>
-        <p:txBody>
-          <a:bodyPr wrap="square">
-            <a:spAutoFit/>
-          </a:bodyPr>
-          <a:lstStyle/>
-          <a:p>
-            <a:pPr algn="ctr"/>
-            <a:r>
-              <a:rPr sz="1400" b="1" i="1" dirty="0">
-                <a:latin typeface="Calibri"/>
-              </a:rPr>
-              <a:t>yₙ = yₙ₋₁ − dₙ₋ₙFIFO + dₙ          </a:t>
-            </a:r>
-            <a:r>
-              <a:rPr sz="1400" b="1" i="1" dirty="0" err="1">
-                <a:latin typeface="Calibri"/>
-              </a:rPr>
-              <a:t>dfilter_output</a:t>
-            </a:r>
-            <a:r>
-              <a:rPr sz="1400" b="1" i="1" dirty="0">
-                <a:latin typeface="Calibri"/>
-              </a:rPr>
-              <a:t> = yₙ / NFIFO</a:t>
-            </a:r>
-          </a:p>
-        </p:txBody>
-      </p:sp>
       <p:graphicFrame>
         <p:nvGraphicFramePr>
           <p:cNvPr id="23" name="Table 28">
@@ -9944,14 +9197,14 @@
           <p:nvPr>
             <p:extLst>
               <p:ext uri="{D42A27DB-BD31-4B8C-83A1-F6EECF244321}">
-                <p14:modId xmlns:p14="http://schemas.microsoft.com/office/powerpoint/2010/main" val="1675330064"/>
+                <p14:modId xmlns:p14="http://schemas.microsoft.com/office/powerpoint/2010/main" val="1618491242"/>
               </p:ext>
             </p:extLst>
           </p:nvPr>
         </p:nvGraphicFramePr>
         <p:xfrm>
-          <a:off x="1112520" y="2879280"/>
-          <a:ext cx="9966960" cy="2331720"/>
+          <a:off x="1112520" y="3759327"/>
+          <a:ext cx="9966960" cy="1815402"/>
         </p:xfrm>
         <a:graphic>
           <a:graphicData uri="http://schemas.openxmlformats.org/drawingml/2006/table">
@@ -9989,7 +9242,7 @@
                   </a:extLst>
                 </a:gridCol>
               </a:tblGrid>
-              <a:tr h="388620">
+              <a:tr h="302567">
                 <a:tc>
                   <a:txBody>
                     <a:bodyPr/>
@@ -10040,7 +9293,7 @@
                     <a:lstStyle/>
                     <a:p>
                       <a:r>
-                        <a:rPr sz="1000" b="1">
+                        <a:rPr sz="1000" b="1" dirty="0">
                           <a:solidFill>
                             <a:srgbClr val="FFFFFF"/>
                           </a:solidFill>
@@ -10084,7 +9337,7 @@
                   </a:ext>
                 </a:extLst>
               </a:tr>
-              <a:tr h="388620">
+              <a:tr h="302567">
                 <a:tc>
                   <a:txBody>
                     <a:bodyPr/>
@@ -10129,7 +9382,7 @@
                     <a:lstStyle/>
                     <a:p>
                       <a:r>
-                        <a:rPr sz="1000">
+                        <a:rPr sz="1000" dirty="0">
                           <a:latin typeface="Calibri"/>
                         </a:rPr>
                         <a:t>integer</a:t>
@@ -10167,7 +9420,7 @@
                   </a:ext>
                 </a:extLst>
               </a:tr>
-              <a:tr h="388620">
+              <a:tr h="302567">
                 <a:tc>
                   <a:txBody>
                     <a:bodyPr/>
@@ -10250,7 +9503,7 @@
                   </a:ext>
                 </a:extLst>
               </a:tr>
-              <a:tr h="388620">
+              <a:tr h="302567">
                 <a:tc>
                   <a:txBody>
                     <a:bodyPr/>
@@ -10333,7 +9586,7 @@
                   </a:ext>
                 </a:extLst>
               </a:tr>
-              <a:tr h="388620">
+              <a:tr h="302567">
                 <a:tc>
                   <a:txBody>
                     <a:bodyPr/>
@@ -10416,7 +9669,7 @@
                   </a:ext>
                 </a:extLst>
               </a:tr>
-              <a:tr h="388620">
+              <a:tr h="302567">
                 <a:tc>
                   <a:txBody>
                     <a:bodyPr/>
@@ -10517,7 +9770,7 @@
         </p:nvSpPr>
         <p:spPr>
           <a:xfrm>
-            <a:off x="2499770" y="5289824"/>
+            <a:off x="2499770" y="5574731"/>
             <a:ext cx="6785637" cy="307777"/>
           </a:xfrm>
           <a:prstGeom prst="rect">
@@ -10571,6 +9824,36 @@
           </a:p>
         </p:txBody>
       </p:sp>
+      <p:pic>
+        <p:nvPicPr>
+          <p:cNvPr id="9" name="Immagine 8">
+            <a:extLst>
+              <a:ext uri="{FF2B5EF4-FFF2-40B4-BE49-F238E27FC236}">
+                <a16:creationId xmlns:a16="http://schemas.microsoft.com/office/drawing/2014/main" id="{DBC0725A-8AB2-E640-A1F4-B78D22B277C5}"/>
+              </a:ext>
+            </a:extLst>
+          </p:cNvPr>
+          <p:cNvPicPr>
+            <a:picLocks noChangeAspect="1"/>
+          </p:cNvPicPr>
+          <p:nvPr/>
+        </p:nvPicPr>
+        <p:blipFill>
+          <a:blip r:embed="rId2"/>
+          <a:stretch>
+            <a:fillRect/>
+          </a:stretch>
+        </p:blipFill>
+        <p:spPr>
+          <a:xfrm>
+            <a:off x="1112520" y="1273305"/>
+            <a:ext cx="9966960" cy="2425725"/>
+          </a:xfrm>
+          <a:prstGeom prst="rect">
+            <a:avLst/>
+          </a:prstGeom>
+        </p:spPr>
+      </p:pic>
     </p:spTree>
     <p:extLst>
       <p:ext uri="{BB962C8B-B14F-4D97-AF65-F5344CB8AC3E}">
@@ -10644,7 +9927,7 @@
               <a:rPr lang="it-IT" dirty="0">
                 <a:latin typeface="Calibri"/>
               </a:rPr>
-              <a:t> — Design</a:t>
+              <a:t> - Design</a:t>
             </a:r>
             <a:endParaRPr lang="en-US" dirty="0"/>
           </a:p>
@@ -11398,7 +10681,7 @@
         <p:spPr>
           <a:xfrm>
             <a:off x="6142914" y="1591056"/>
-            <a:ext cx="5221224" cy="999744"/>
+            <a:ext cx="5221224" cy="707886"/>
           </a:xfrm>
           <a:prstGeom prst="rect">
             <a:avLst/>
@@ -11413,13 +10696,49 @@
           <a:p>
             <a:pPr algn="l"/>
             <a:r>
-              <a:rPr sz="1000" b="0" i="0">
-                <a:solidFill>
-                  <a:srgbClr val="000000"/>
-                </a:solidFill>
-                <a:latin typeface="Calibri"/>
-              </a:rPr>
-              <a:t>yₙ = yₙ₋₁ − dₙ₋ₙFIFO + dₙ
+              <a:rPr sz="1000" b="0" i="0" dirty="0">
+                <a:solidFill>
+                  <a:srgbClr val="000000"/>
+                </a:solidFill>
+                <a:latin typeface="Calibri"/>
+              </a:rPr>
+              <a:t>yₙ = yₙ₋₁ </a:t>
+            </a:r>
+            <a:r>
+              <a:rPr lang="it-IT" sz="1000" b="0" i="0" dirty="0">
+                <a:solidFill>
+                  <a:srgbClr val="000000"/>
+                </a:solidFill>
+                <a:latin typeface="Calibri"/>
+              </a:rPr>
+              <a:t>-</a:t>
+            </a:r>
+            <a:r>
+              <a:rPr sz="1000" b="0" i="0" dirty="0">
+                <a:solidFill>
+                  <a:srgbClr val="000000"/>
+                </a:solidFill>
+                <a:latin typeface="Calibri"/>
+              </a:rPr>
+              <a:t> dₙ₋</a:t>
+            </a:r>
+            <a:r>
+              <a:rPr lang="it-IT" sz="1000" b="0" i="0" dirty="0">
+                <a:solidFill>
+                  <a:srgbClr val="000000"/>
+                </a:solidFill>
+                <a:latin typeface="Calibri"/>
+              </a:rPr>
+              <a:t>ₙFIFO</a:t>
+            </a:r>
+            <a:r>
+              <a:rPr sz="1000" b="0" i="0" dirty="0">
+                <a:solidFill>
+                  <a:srgbClr val="000000"/>
+                </a:solidFill>
+                <a:latin typeface="Calibri"/>
+              </a:rPr>
+              <a:t> + dₙ
 Instead of summing NFIFO samples each cycle, only the oldest sample is subtracted and the newest added. O(1) complexity per clock cycle.</a:t>
             </a:r>
           </a:p>
@@ -12038,7 +11357,7 @@
           <p:nvPr>
             <p:extLst>
               <p:ext uri="{D42A27DB-BD31-4B8C-83A1-F6EECF244321}">
-                <p14:modId xmlns:p14="http://schemas.microsoft.com/office/powerpoint/2010/main" val="273256144"/>
+                <p14:modId xmlns:p14="http://schemas.microsoft.com/office/powerpoint/2010/main" val="2605247857"/>
               </p:ext>
             </p:extLst>
           </p:nvPr>
@@ -12242,10 +11561,22 @@
                     <a:lstStyle/>
                     <a:p>
                       <a:r>
-                        <a:rPr sz="1000">
-                          <a:latin typeface="Calibri"/>
-                        </a:rPr>
-                        <a:t>dₙ — current sample</a:t>
+                        <a:rPr sz="1000" dirty="0">
+                          <a:latin typeface="Calibri"/>
+                        </a:rPr>
+                        <a:t>dₙ </a:t>
+                      </a:r>
+                      <a:r>
+                        <a:rPr lang="it-IT" sz="1000" dirty="0">
+                          <a:latin typeface="Calibri"/>
+                        </a:rPr>
+                        <a:t>-</a:t>
+                      </a:r>
+                      <a:r>
+                        <a:rPr sz="1000" dirty="0">
+                          <a:latin typeface="Calibri"/>
+                        </a:rPr>
+                        <a:t> current sample</a:t>
                       </a:r>
                     </a:p>
                   </a:txBody>
@@ -12328,7 +11659,19 @@
                         <a:rPr sz="1000" dirty="0">
                           <a:latin typeface="Calibri"/>
                         </a:rPr>
-                        <a:t>dₙ₋ₙFIFO — oldest sample</a:t>
+                        <a:t>dₙ₋ₙFIFO </a:t>
+                      </a:r>
+                      <a:r>
+                        <a:rPr lang="it-IT" sz="1000" dirty="0">
+                          <a:latin typeface="Calibri"/>
+                        </a:rPr>
+                        <a:t>- </a:t>
+                      </a:r>
+                      <a:r>
+                        <a:rPr sz="1000" dirty="0">
+                          <a:latin typeface="Calibri"/>
+                        </a:rPr>
+                        <a:t>oldest sample</a:t>
                       </a:r>
                     </a:p>
                   </a:txBody>
@@ -12408,10 +11751,22 @@
                     <a:lstStyle/>
                     <a:p>
                       <a:r>
-                        <a:rPr sz="1000">
-                          <a:latin typeface="Calibri"/>
-                        </a:rPr>
-                        <a:t>yₙ₋₁ — running sum</a:t>
+                        <a:rPr sz="1000" dirty="0">
+                          <a:latin typeface="Calibri"/>
+                        </a:rPr>
+                        <a:t>yₙ₋₁ </a:t>
+                      </a:r>
+                      <a:r>
+                        <a:rPr lang="it-IT" sz="1000" dirty="0">
+                          <a:latin typeface="Calibri"/>
+                        </a:rPr>
+                        <a:t>-</a:t>
+                      </a:r>
+                      <a:r>
+                        <a:rPr sz="1000" dirty="0">
+                          <a:latin typeface="Calibri"/>
+                        </a:rPr>
+                        <a:t> running sum</a:t>
                       </a:r>
                     </a:p>
                   </a:txBody>
@@ -12500,7 +11855,19 @@
                         <a:rPr sz="1000" dirty="0">
                           <a:latin typeface="Calibri"/>
                         </a:rPr>
-                        <a:t>yₙ = 16383 − 15 + 1 </a:t>
+                        <a:t>yₙ = 16383 </a:t>
+                      </a:r>
+                      <a:r>
+                        <a:rPr lang="it-IT" sz="1000" dirty="0">
+                          <a:latin typeface="Calibri"/>
+                        </a:rPr>
+                        <a:t>-</a:t>
+                      </a:r>
+                      <a:r>
+                        <a:rPr sz="1000" dirty="0">
+                          <a:latin typeface="Calibri"/>
+                        </a:rPr>
+                        <a:t> 15 + 1 </a:t>
                       </a:r>
                     </a:p>
                   </a:txBody>
@@ -12892,7 +12259,25 @@
                 </a:solidFill>
                 <a:latin typeface="Courier New"/>
               </a:rPr>
-              <a:t>  : in  signed(Nb+log2NFIFO-1 </a:t>
+              <a:t>  : in  signed(Nb+log2NFIFO</a:t>
+            </a:r>
+            <a:r>
+              <a:rPr lang="it-IT" sz="800" dirty="0">
+                <a:solidFill>
+                  <a:srgbClr val="000000"/>
+                </a:solidFill>
+                <a:latin typeface="Courier New"/>
+              </a:rPr>
+              <a:t>-</a:t>
+            </a:r>
+            <a:r>
+              <a:rPr sz="800" dirty="0">
+                <a:solidFill>
+                  <a:srgbClr val="000000"/>
+                </a:solidFill>
+                <a:latin typeface="Courier New"/>
+              </a:rPr>
+              <a:t>1 </a:t>
             </a:r>
             <a:r>
               <a:rPr sz="800" dirty="0" err="1">
@@ -12950,7 +12335,25 @@
               <a:t> 0));
 end accumulator;
 architecture Behavioral of accumulator is
-  signal reg : signed(Nb+log2NFIFO-1 </a:t>
+  signal reg : signed(Nb+log2NFIFO</a:t>
+            </a:r>
+            <a:r>
+              <a:rPr lang="it-IT" sz="800" dirty="0">
+                <a:solidFill>
+                  <a:srgbClr val="000000"/>
+                </a:solidFill>
+                <a:latin typeface="Courier New"/>
+              </a:rPr>
+              <a:t>-</a:t>
+            </a:r>
+            <a:r>
+              <a:rPr sz="800" dirty="0">
+                <a:solidFill>
+                  <a:srgbClr val="000000"/>
+                </a:solidFill>
+                <a:latin typeface="Courier New"/>
+              </a:rPr>
+              <a:t>1 </a:t>
             </a:r>
             <a:r>
               <a:rPr sz="800" dirty="0" err="1">
@@ -13768,7 +13171,7 @@
           <p:nvPr>
             <p:extLst>
               <p:ext uri="{D42A27DB-BD31-4B8C-83A1-F6EECF244321}">
-                <p14:modId xmlns:p14="http://schemas.microsoft.com/office/powerpoint/2010/main" val="1521391282"/>
+                <p14:modId xmlns:p14="http://schemas.microsoft.com/office/powerpoint/2010/main" val="2839933322"/>
               </p:ext>
             </p:extLst>
           </p:nvPr>
@@ -14045,7 +13448,25 @@
                           </a:solidFill>
                           <a:latin typeface="Calibri"/>
                         </a:rPr>
-                        <a:t>3276 — PIPO register latches input </a:t>
+                        <a:t>3276 </a:t>
+                      </a:r>
+                      <a:r>
+                        <a:rPr lang="it-IT" sz="1000" b="0" dirty="0">
+                          <a:solidFill>
+                            <a:schemeClr val="tx1"/>
+                          </a:solidFill>
+                          <a:latin typeface="Calibri"/>
+                        </a:rPr>
+                        <a:t>-</a:t>
+                      </a:r>
+                      <a:r>
+                        <a:rPr sz="1000" b="0" dirty="0">
+                          <a:solidFill>
+                            <a:schemeClr val="tx1"/>
+                          </a:solidFill>
+                          <a:latin typeface="Calibri"/>
+                        </a:rPr>
+                        <a:t> PIPO register latches input </a:t>
                       </a:r>
                     </a:p>
                   </a:txBody>
@@ -18529,20 +17950,20 @@
 </file>
 
 <file path=customXml/item2.xml><?xml version="1.0" encoding="utf-8"?>
-<p:properties xmlns:p="http://schemas.microsoft.com/office/2006/metadata/properties" xmlns:xsi="http://www.w3.org/2001/XMLSchema-instance" xmlns:pc="http://schemas.microsoft.com/office/infopath/2007/PartnerControls">
-  <documentManagement>
-    <_activity xmlns="d81608ca-db68-4891-9f53-9b89cbfff5c6" xsi:nil="true"/>
-  </documentManagement>
-</p:properties>
-</file>
-
-<file path=customXml/item3.xml><?xml version="1.0" encoding="utf-8"?>
 <?mso-contentType ?>
 <FormTemplates xmlns="http://schemas.microsoft.com/sharepoint/v3/contenttype/forms">
   <Display>DocumentLibraryForm</Display>
   <Edit>DocumentLibraryForm</Edit>
   <New>DocumentLibraryForm</New>
 </FormTemplates>
+</file>
+
+<file path=customXml/item3.xml><?xml version="1.0" encoding="utf-8"?>
+<p:properties xmlns:p="http://schemas.microsoft.com/office/2006/metadata/properties" xmlns:xsi="http://www.w3.org/2001/XMLSchema-instance" xmlns:pc="http://schemas.microsoft.com/office/infopath/2007/PartnerControls">
+  <documentManagement>
+    <_activity xmlns="d81608ca-db68-4891-9f53-9b89cbfff5c6" xsi:nil="true"/>
+  </documentManagement>
+</p:properties>
 </file>
 
 <file path=customXml/itemProps1.xml><?xml version="1.0" encoding="utf-8"?>
@@ -18565,6 +17986,14 @@
 </file>
 
 <file path=customXml/itemProps2.xml><?xml version="1.0" encoding="utf-8"?>
+<ds:datastoreItem xmlns:ds="http://schemas.openxmlformats.org/officeDocument/2006/customXml" ds:itemID="{6E8D78F2-F211-4F79-8A63-15AEAF64F23A}">
+  <ds:schemaRefs>
+    <ds:schemaRef ds:uri="http://schemas.microsoft.com/sharepoint/v3/contenttype/forms"/>
+  </ds:schemaRefs>
+</ds:datastoreItem>
+</file>
+
+<file path=customXml/itemProps3.xml><?xml version="1.0" encoding="utf-8"?>
 <ds:datastoreItem xmlns:ds="http://schemas.openxmlformats.org/officeDocument/2006/customXml" ds:itemID="{3F5952B0-BE3F-4397-8C49-DFA106167C99}">
   <ds:schemaRefs>
     <ds:schemaRef ds:uri="http://schemas.microsoft.com/office/2006/documentManagement/types"/>
@@ -18579,12 +18008,4 @@
     <ds:schemaRef ds:uri="http://purl.org/dc/elements/1.1/"/>
   </ds:schemaRefs>
 </ds:datastoreItem>
-</file>
-
-<file path=customXml/itemProps3.xml><?xml version="1.0" encoding="utf-8"?>
-<ds:datastoreItem xmlns:ds="http://schemas.openxmlformats.org/officeDocument/2006/customXml" ds:itemID="{6E8D78F2-F211-4F79-8A63-15AEAF64F23A}">
-  <ds:schemaRefs>
-    <ds:schemaRef ds:uri="http://schemas.microsoft.com/sharepoint/v3/contenttype/forms"/>
-  </ds:schemaRefs>
-</ds:datastoreItem>
 </file>
--- a/DocumentazioneDiProgetto_ElHanafi.pptx
+++ b/DocumentazioneDiProgetto_ElHanafi.pptx
@@ -1970,10 +1970,7 @@
             <a:pPr>
               <a:defRPr/>
             </a:pPr>
-            <a:r>
-              <a:rPr lang="en-US" dirty="0"/>
-              <a:t>Author</a:t>
-            </a:r>
+            <a:endParaRPr lang="en-US" dirty="0"/>
           </a:p>
         </p:txBody>
       </p:sp>
@@ -2532,10 +2529,7 @@
             <a:pPr>
               <a:defRPr/>
             </a:pPr>
-            <a:r>
-              <a:rPr lang="en-US" dirty="0"/>
-              <a:t>Author</a:t>
-            </a:r>
+            <a:endParaRPr lang="en-US" dirty="0"/>
           </a:p>
         </p:txBody>
       </p:sp>
@@ -2659,7 +2653,7 @@
     <p:sldLayoutId id="2147484080" r:id="rId5"/>
   </p:sldLayoutIdLst>
   <p:transition/>
-  <p:hf hdr="0"/>
+  <p:hf hdr="0" ftr="0" dt="0"/>
   <p:txStyles>
     <p:titleStyle>
       <a:lvl1pPr algn="l" rtl="0" eaLnBrk="0" fontAlgn="base" hangingPunct="0">
@@ -4857,26 +4851,38 @@
                 </a:solidFill>
                 <a:latin typeface="Calibri"/>
               </a:rPr>
-              <a:t>Signal nearly flat. </a:t>
-            </a:r>
-            <a:r>
-              <a:rPr lang="en-US" sz="900" dirty="0" err="1">
-                <a:solidFill>
-                  <a:srgbClr val="000000"/>
-                </a:solidFill>
-                <a:latin typeface="Calibri"/>
-              </a:rPr>
-              <a:t>Fillter</a:t>
-            </a:r>
-            <a:r>
-              <a:rPr lang="en-US" sz="900" dirty="0">
-                <a:solidFill>
-                  <a:srgbClr val="000000"/>
-                </a:solidFill>
-                <a:latin typeface="Calibri"/>
-              </a:rPr>
-              <a:t> has removed the sinusoid itself, not just noise.</a:t>
-            </a:r>
+              <a:t>Signal nearly flat. Filter has removed the sinusoid itself, not just noise.</a:t>
+            </a:r>
+          </a:p>
+        </p:txBody>
+      </p:sp>
+      <p:sp>
+        <p:nvSpPr>
+          <p:cNvPr id="3" name="Segnaposto numero diapositiva 2">
+            <a:extLst>
+              <a:ext uri="{FF2B5EF4-FFF2-40B4-BE49-F238E27FC236}">
+                <a16:creationId xmlns:a16="http://schemas.microsoft.com/office/drawing/2014/main" id="{9F334037-AF65-6395-1EF2-E709D450979C}"/>
+              </a:ext>
+            </a:extLst>
+          </p:cNvPr>
+          <p:cNvSpPr>
+            <a:spLocks noGrp="1"/>
+          </p:cNvSpPr>
+          <p:nvPr>
+            <p:ph type="sldNum" sz="quarter" idx="11"/>
+          </p:nvPr>
+        </p:nvSpPr>
+        <p:spPr/>
+        <p:txBody>
+          <a:bodyPr/>
+          <a:lstStyle/>
+          <a:p>
+            <a:fld id="{2E6AEE32-87CF-4B18-ACD9-DC92317905A5}" type="slidenum">
+              <a:rPr lang="en-US" altLang="en-US" smtClean="0"/>
+              <a:pPr/>
+              <a:t>10</a:t>
+            </a:fld>
+            <a:endParaRPr lang="en-US" altLang="en-US" dirty="0"/>
           </a:p>
         </p:txBody>
       </p:sp>
@@ -5972,6 +5978,36 @@
           </a:p>
         </p:txBody>
       </p:sp>
+      <p:sp>
+        <p:nvSpPr>
+          <p:cNvPr id="4" name="Segnaposto numero diapositiva 3">
+            <a:extLst>
+              <a:ext uri="{FF2B5EF4-FFF2-40B4-BE49-F238E27FC236}">
+                <a16:creationId xmlns:a16="http://schemas.microsoft.com/office/drawing/2014/main" id="{DC1E8A24-FAD7-6EAC-0C7B-7EE546901553}"/>
+              </a:ext>
+            </a:extLst>
+          </p:cNvPr>
+          <p:cNvSpPr>
+            <a:spLocks noGrp="1"/>
+          </p:cNvSpPr>
+          <p:nvPr>
+            <p:ph type="sldNum" sz="quarter" idx="11"/>
+          </p:nvPr>
+        </p:nvSpPr>
+        <p:spPr/>
+        <p:txBody>
+          <a:bodyPr/>
+          <a:lstStyle/>
+          <a:p>
+            <a:fld id="{2E6AEE32-87CF-4B18-ACD9-DC92317905A5}" type="slidenum">
+              <a:rPr lang="en-US" altLang="en-US" smtClean="0"/>
+              <a:pPr/>
+              <a:t>11</a:t>
+            </a:fld>
+            <a:endParaRPr lang="en-US" altLang="en-US" dirty="0"/>
+          </a:p>
+        </p:txBody>
+      </p:sp>
     </p:spTree>
   </p:cSld>
   <p:clrMapOvr>
@@ -7451,6 +7487,36 @@
           </a:p>
         </p:txBody>
       </p:sp>
+      <p:sp>
+        <p:nvSpPr>
+          <p:cNvPr id="3" name="Segnaposto numero diapositiva 2">
+            <a:extLst>
+              <a:ext uri="{FF2B5EF4-FFF2-40B4-BE49-F238E27FC236}">
+                <a16:creationId xmlns:a16="http://schemas.microsoft.com/office/drawing/2014/main" id="{D6491FF5-E49F-D89C-DFF1-8C3E286DA799}"/>
+              </a:ext>
+            </a:extLst>
+          </p:cNvPr>
+          <p:cNvSpPr>
+            <a:spLocks noGrp="1"/>
+          </p:cNvSpPr>
+          <p:nvPr>
+            <p:ph type="sldNum" sz="quarter" idx="11"/>
+          </p:nvPr>
+        </p:nvSpPr>
+        <p:spPr/>
+        <p:txBody>
+          <a:bodyPr/>
+          <a:lstStyle/>
+          <a:p>
+            <a:fld id="{2E6AEE32-87CF-4B18-ACD9-DC92317905A5}" type="slidenum">
+              <a:rPr lang="en-US" altLang="en-US" smtClean="0"/>
+              <a:pPr/>
+              <a:t>12</a:t>
+            </a:fld>
+            <a:endParaRPr lang="en-US" altLang="en-US" dirty="0"/>
+          </a:p>
+        </p:txBody>
+      </p:sp>
     </p:spTree>
   </p:cSld>
   <p:clrMapOvr>
@@ -8867,6 +8933,36 @@
           </a:p>
         </p:txBody>
       </p:sp>
+      <p:sp>
+        <p:nvSpPr>
+          <p:cNvPr id="3" name="Segnaposto numero diapositiva 2">
+            <a:extLst>
+              <a:ext uri="{FF2B5EF4-FFF2-40B4-BE49-F238E27FC236}">
+                <a16:creationId xmlns:a16="http://schemas.microsoft.com/office/drawing/2014/main" id="{5C822693-5715-90C3-C133-2ED9939B580D}"/>
+              </a:ext>
+            </a:extLst>
+          </p:cNvPr>
+          <p:cNvSpPr>
+            <a:spLocks noGrp="1"/>
+          </p:cNvSpPr>
+          <p:nvPr>
+            <p:ph type="sldNum" sz="quarter" idx="11"/>
+          </p:nvPr>
+        </p:nvSpPr>
+        <p:spPr/>
+        <p:txBody>
+          <a:bodyPr/>
+          <a:lstStyle/>
+          <a:p>
+            <a:fld id="{2E6AEE32-87CF-4B18-ACD9-DC92317905A5}" type="slidenum">
+              <a:rPr lang="en-US" altLang="en-US" smtClean="0"/>
+              <a:pPr/>
+              <a:t>13</a:t>
+            </a:fld>
+            <a:endParaRPr lang="en-US" altLang="en-US" dirty="0"/>
+          </a:p>
+        </p:txBody>
+      </p:sp>
     </p:spTree>
   </p:cSld>
   <p:clrMapOvr>
@@ -9072,6 +9168,36 @@
               <a:rPr lang="en-US" sz="1600" dirty="0"/>
               <a:t>Pipelined FIFO for higher throughput at the same clock frequency</a:t>
             </a:r>
+          </a:p>
+        </p:txBody>
+      </p:sp>
+      <p:sp>
+        <p:nvSpPr>
+          <p:cNvPr id="3" name="Segnaposto numero diapositiva 2">
+            <a:extLst>
+              <a:ext uri="{FF2B5EF4-FFF2-40B4-BE49-F238E27FC236}">
+                <a16:creationId xmlns:a16="http://schemas.microsoft.com/office/drawing/2014/main" id="{6B67EE43-7B0A-AA19-9D8E-D5E9AC2A4CB2}"/>
+              </a:ext>
+            </a:extLst>
+          </p:cNvPr>
+          <p:cNvSpPr>
+            <a:spLocks noGrp="1"/>
+          </p:cNvSpPr>
+          <p:nvPr>
+            <p:ph type="sldNum" sz="quarter" idx="11"/>
+          </p:nvPr>
+        </p:nvSpPr>
+        <p:spPr/>
+        <p:txBody>
+          <a:bodyPr/>
+          <a:lstStyle/>
+          <a:p>
+            <a:fld id="{2E6AEE32-87CF-4B18-ACD9-DC92317905A5}" type="slidenum">
+              <a:rPr lang="en-US" altLang="en-US" smtClean="0"/>
+              <a:pPr/>
+              <a:t>14</a:t>
+            </a:fld>
+            <a:endParaRPr lang="en-US" altLang="en-US" dirty="0"/>
           </a:p>
         </p:txBody>
       </p:sp>
@@ -9960,34 +10086,6 @@
               <a:t>3</a:t>
             </a:fld>
             <a:endParaRPr lang="en-US" altLang="en-US" dirty="0"/>
-          </a:p>
-        </p:txBody>
-      </p:sp>
-      <p:sp>
-        <p:nvSpPr>
-          <p:cNvPr id="5" name="Footer Placeholder 4">
-            <a:extLst>
-              <a:ext uri="{FF2B5EF4-FFF2-40B4-BE49-F238E27FC236}">
-                <a16:creationId xmlns:a16="http://schemas.microsoft.com/office/drawing/2014/main" id="{EFE442AA-AD93-3C3F-2C0D-F8DD3D560D81}"/>
-              </a:ext>
-            </a:extLst>
-          </p:cNvPr>
-          <p:cNvSpPr>
-            <a:spLocks noGrp="1"/>
-          </p:cNvSpPr>
-          <p:nvPr>
-            <p:ph type="ftr" sz="quarter" idx="12"/>
-          </p:nvPr>
-        </p:nvSpPr>
-        <p:spPr/>
-        <p:txBody>
-          <a:bodyPr/>
-          <a:lstStyle/>
-          <a:p>
-            <a:pPr>
-              <a:defRPr/>
-            </a:pPr>
-            <a:endParaRPr lang="en-US" dirty="0"/>
           </a:p>
         </p:txBody>
       </p:sp>
@@ -14787,6 +14885,36 @@
           </a:p>
         </p:txBody>
       </p:sp>
+      <p:sp>
+        <p:nvSpPr>
+          <p:cNvPr id="3" name="Segnaposto numero diapositiva 2">
+            <a:extLst>
+              <a:ext uri="{FF2B5EF4-FFF2-40B4-BE49-F238E27FC236}">
+                <a16:creationId xmlns:a16="http://schemas.microsoft.com/office/drawing/2014/main" id="{0ED36798-B928-0E31-FA2E-CBCDE19E1A63}"/>
+              </a:ext>
+            </a:extLst>
+          </p:cNvPr>
+          <p:cNvSpPr>
+            <a:spLocks noGrp="1"/>
+          </p:cNvSpPr>
+          <p:nvPr>
+            <p:ph type="sldNum" sz="quarter" idx="11"/>
+          </p:nvPr>
+        </p:nvSpPr>
+        <p:spPr/>
+        <p:txBody>
+          <a:bodyPr/>
+          <a:lstStyle/>
+          <a:p>
+            <a:fld id="{2E6AEE32-87CF-4B18-ACD9-DC92317905A5}" type="slidenum">
+              <a:rPr lang="en-US" altLang="en-US" smtClean="0"/>
+              <a:pPr/>
+              <a:t>7</a:t>
+            </a:fld>
+            <a:endParaRPr lang="en-US" altLang="en-US" dirty="0"/>
+          </a:p>
+        </p:txBody>
+      </p:sp>
     </p:spTree>
   </p:cSld>
   <p:clrMapOvr>
@@ -15350,6 +15478,36 @@
           </a:prstGeom>
         </p:spPr>
       </p:pic>
+      <p:sp>
+        <p:nvSpPr>
+          <p:cNvPr id="3" name="Segnaposto numero diapositiva 2">
+            <a:extLst>
+              <a:ext uri="{FF2B5EF4-FFF2-40B4-BE49-F238E27FC236}">
+                <a16:creationId xmlns:a16="http://schemas.microsoft.com/office/drawing/2014/main" id="{E67C1C18-CB60-5551-1B2A-D85E404642F4}"/>
+              </a:ext>
+            </a:extLst>
+          </p:cNvPr>
+          <p:cNvSpPr>
+            <a:spLocks noGrp="1"/>
+          </p:cNvSpPr>
+          <p:nvPr>
+            <p:ph type="sldNum" sz="quarter" idx="11"/>
+          </p:nvPr>
+        </p:nvSpPr>
+        <p:spPr/>
+        <p:txBody>
+          <a:bodyPr/>
+          <a:lstStyle/>
+          <a:p>
+            <a:fld id="{2E6AEE32-87CF-4B18-ACD9-DC92317905A5}" type="slidenum">
+              <a:rPr lang="en-US" altLang="en-US" smtClean="0"/>
+              <a:pPr/>
+              <a:t>8</a:t>
+            </a:fld>
+            <a:endParaRPr lang="en-US" altLang="en-US" dirty="0"/>
+          </a:p>
+        </p:txBody>
+      </p:sp>
     </p:spTree>
   </p:cSld>
   <p:clrMapOvr>
@@ -16313,7 +16471,25 @@
                 </a:solidFill>
                 <a:latin typeface="Calibri"/>
               </a:rPr>
-              <a:t> kHz ≈ f₀
+              <a:t> kHz </a:t>
+            </a:r>
+            <a:r>
+              <a:rPr lang="it-IT" sz="900" b="0" i="0" dirty="0">
+                <a:solidFill>
+                  <a:srgbClr val="000000"/>
+                </a:solidFill>
+                <a:latin typeface="Calibri"/>
+              </a:rPr>
+              <a:t>&lt;</a:t>
+            </a:r>
+            <a:r>
+              <a:rPr sz="900" b="0" i="0" dirty="0">
+                <a:solidFill>
+                  <a:srgbClr val="000000"/>
+                </a:solidFill>
+                <a:latin typeface="Calibri"/>
+              </a:rPr>
+              <a:t> f₀
 </a:t>
             </a:r>
             <a:r>
@@ -16439,6 +16615,36 @@
               </a:solidFill>
               <a:latin typeface="Calibri"/>
             </a:endParaRPr>
+          </a:p>
+        </p:txBody>
+      </p:sp>
+      <p:sp>
+        <p:nvSpPr>
+          <p:cNvPr id="3" name="Segnaposto numero diapositiva 2">
+            <a:extLst>
+              <a:ext uri="{FF2B5EF4-FFF2-40B4-BE49-F238E27FC236}">
+                <a16:creationId xmlns:a16="http://schemas.microsoft.com/office/drawing/2014/main" id="{ACE66064-9086-F776-AEC8-D8310A91AA08}"/>
+              </a:ext>
+            </a:extLst>
+          </p:cNvPr>
+          <p:cNvSpPr>
+            <a:spLocks noGrp="1"/>
+          </p:cNvSpPr>
+          <p:nvPr>
+            <p:ph type="sldNum" sz="quarter" idx="11"/>
+          </p:nvPr>
+        </p:nvSpPr>
+        <p:spPr/>
+        <p:txBody>
+          <a:bodyPr/>
+          <a:lstStyle/>
+          <a:p>
+            <a:fld id="{2E6AEE32-87CF-4B18-ACD9-DC92317905A5}" type="slidenum">
+              <a:rPr lang="en-US" altLang="en-US" smtClean="0"/>
+              <a:pPr/>
+              <a:t>9</a:t>
+            </a:fld>
+            <a:endParaRPr lang="en-US" altLang="en-US" dirty="0"/>
           </a:p>
         </p:txBody>
       </p:sp>
